--- a/report-generator/src/report_generator/presets/templates/objectives.pptx
+++ b/report-generator/src/report_generator/presets/templates/objectives.pptx
@@ -213,7 +213,7 @@
                 </a:outerShdw>
               </a:effectLst>
             </c:spPr>
-            <c:extLst xmlns:w="http://schemas.openxmlformats.org/wordprocessingml/2006/main" xmlns:w15="http://schemas.microsoft.com/office/word/2012/wordml" xmlns:w14="http://schemas.microsoft.com/office/word/2010/wordml" xmlns:m="http://schemas.openxmlformats.org/officeDocument/2006/math" xmlns:wp="http://schemas.openxmlformats.org/drawingml/2006/wordprocessingDrawing" xmlns:wp14="http://schemas.microsoft.com/office/word/2010/wordprocessingDrawing" xmlns:mc="http://schemas.openxmlformats.org/markup-compatibility/2006" xmlns:sl="http://schemas.openxmlformats.org/schemaLibrary/2006/main" xmlns:wne="http://schemas.microsoft.com/office/word/2006/wordml" xmlns:cdr="http://schemas.openxmlformats.org/drawingml/2006/chartDrawing" xmlns:c14="http://schemas.microsoft.com/office/drawing/2007/8/2/chart" xmlns:dgm="http://schemas.openxmlformats.org/drawingml/2006/diagram" xmlns:pic="http://schemas.openxmlformats.org/drawingml/2006/picture" xmlns:xdr="http://schemas.openxmlformats.org/drawingml/2006/spreadsheetDrawing" xmlns:dsp="http://schemas.microsoft.com/office/drawing/2008/diagram" xmlns:xvml="urn:schemas-microsoft-com:office:excel" xmlns:o="urn:schemas-microsoft-com:office:office" xmlns:v="urn:schemas-microsoft-com:vml" xmlns:w10="urn:schemas-microsoft-com:office:word" xmlns:pvml="urn:schemas-microsoft-com:office:powerpoint" xmlns:cppr="http://schemas.microsoft.com/office/2006/coverPageProps" xmlns:odx="http://opendope.org/xpaths" xmlns:odc="http://opendope.org/conditions" xmlns:odq="http://opendope.org/questions" xmlns:oda="http://opendope.org/answers" xmlns:odi="http://opendope.org/components" xmlns:odgm="http://opendope.org/SmartArt/DataHierarchy" xmlns:b="http://schemas.openxmlformats.org/officeDocument/2006/bibliography" xmlns:wps="http://schemas.microsoft.com/office/word/2010/wordprocessingShape" xmlns:w16se="http://schemas.microsoft.com/office/word/2015/wordml/symex" xmlns:w16cid="http://schemas.microsoft.com/office/word/2016/wordml/cid" xmlns:wetp="http://schemas.microsoft.com/office/webextensions/taskpanes/2010/11" xmlns:we="http://schemas.microsoft.com/office/webextensions/webextension/2010/11" xmlns:comp="http://schemas.openxmlformats.org/drawingml/2006/compatibility" xmlns:lc="http://schemas.openxmlformats.org/drawingml/2006/lockedCanvas">
+            <c:extLst xmlns:lc="http://schemas.openxmlformats.org/drawingml/2006/lockedCanvas" xmlns:comp="http://schemas.openxmlformats.org/drawingml/2006/compatibility" xmlns:we="http://schemas.microsoft.com/office/webextensions/webextension/2010/11" xmlns:wetp="http://schemas.microsoft.com/office/webextensions/taskpanes/2010/11" xmlns:w16cid="http://schemas.microsoft.com/office/word/2016/wordml/cid" xmlns:w16se="http://schemas.microsoft.com/office/word/2015/wordml/symex" xmlns:wps="http://schemas.microsoft.com/office/word/2010/wordprocessingShape" xmlns:b="http://schemas.openxmlformats.org/officeDocument/2006/bibliography" xmlns:odgm="http://opendope.org/SmartArt/DataHierarchy" xmlns:odi="http://opendope.org/components" xmlns:oda="http://opendope.org/answers" xmlns:odq="http://opendope.org/questions" xmlns:odc="http://opendope.org/conditions" xmlns:odx="http://opendope.org/xpaths" xmlns:cppr="http://schemas.microsoft.com/office/2006/coverPageProps" xmlns:pvml="urn:schemas-microsoft-com:office:powerpoint" xmlns:w10="urn:schemas-microsoft-com:office:word" xmlns:v="urn:schemas-microsoft-com:vml" xmlns:o="urn:schemas-microsoft-com:office:office" xmlns:xvml="urn:schemas-microsoft-com:office:excel" xmlns:dsp="http://schemas.microsoft.com/office/drawing/2008/diagram" xmlns:xdr="http://schemas.openxmlformats.org/drawingml/2006/spreadsheetDrawing" xmlns:pic="http://schemas.openxmlformats.org/drawingml/2006/picture" xmlns:dgm="http://schemas.openxmlformats.org/drawingml/2006/diagram" xmlns:c14="http://schemas.microsoft.com/office/drawing/2007/8/2/chart" xmlns:cdr="http://schemas.openxmlformats.org/drawingml/2006/chartDrawing" xmlns:wne="http://schemas.microsoft.com/office/word/2006/wordml" xmlns:sl="http://schemas.openxmlformats.org/schemaLibrary/2006/main" xmlns:mc="http://schemas.openxmlformats.org/markup-compatibility/2006" xmlns:wp14="http://schemas.microsoft.com/office/word/2010/wordprocessingDrawing" xmlns:wp="http://schemas.openxmlformats.org/drawingml/2006/wordprocessingDrawing" xmlns:m="http://schemas.openxmlformats.org/officeDocument/2006/math" xmlns:w14="http://schemas.microsoft.com/office/word/2010/wordml" xmlns:w15="http://schemas.microsoft.com/office/word/2012/wordml" xmlns:w="http://schemas.openxmlformats.org/wordprocessingml/2006/main">
               <c:ext xmlns:c16="http://schemas.microsoft.com/office/drawing/2014/chart" uri="{C3380CC4-5D6E-409C-BE32-E72D297353CC}">
                 <c16:uniqueId val="{00000001-6147-E74A-AA7B-5531F0E4EE0C}"/>
               </c:ext>
@@ -242,7 +242,7 @@
               </c:numCache>
             </c:numRef>
           </c:val>
-          <c:extLst xmlns:w="http://schemas.openxmlformats.org/wordprocessingml/2006/main" xmlns:w15="http://schemas.microsoft.com/office/word/2012/wordml" xmlns:w14="http://schemas.microsoft.com/office/word/2010/wordml" xmlns:m="http://schemas.openxmlformats.org/officeDocument/2006/math" xmlns:wp="http://schemas.openxmlformats.org/drawingml/2006/wordprocessingDrawing" xmlns:wp14="http://schemas.microsoft.com/office/word/2010/wordprocessingDrawing" xmlns:mc="http://schemas.openxmlformats.org/markup-compatibility/2006" xmlns:sl="http://schemas.openxmlformats.org/schemaLibrary/2006/main" xmlns:wne="http://schemas.microsoft.com/office/word/2006/wordml" xmlns:cdr="http://schemas.openxmlformats.org/drawingml/2006/chartDrawing" xmlns:c14="http://schemas.microsoft.com/office/drawing/2007/8/2/chart" xmlns:dgm="http://schemas.openxmlformats.org/drawingml/2006/diagram" xmlns:pic="http://schemas.openxmlformats.org/drawingml/2006/picture" xmlns:xdr="http://schemas.openxmlformats.org/drawingml/2006/spreadsheetDrawing" xmlns:dsp="http://schemas.microsoft.com/office/drawing/2008/diagram" xmlns:xvml="urn:schemas-microsoft-com:office:excel" xmlns:o="urn:schemas-microsoft-com:office:office" xmlns:v="urn:schemas-microsoft-com:vml" xmlns:w10="urn:schemas-microsoft-com:office:word" xmlns:pvml="urn:schemas-microsoft-com:office:powerpoint" xmlns:cppr="http://schemas.microsoft.com/office/2006/coverPageProps" xmlns:odx="http://opendope.org/xpaths" xmlns:odc="http://opendope.org/conditions" xmlns:odq="http://opendope.org/questions" xmlns:oda="http://opendope.org/answers" xmlns:odi="http://opendope.org/components" xmlns:odgm="http://opendope.org/SmartArt/DataHierarchy" xmlns:b="http://schemas.openxmlformats.org/officeDocument/2006/bibliography" xmlns:wps="http://schemas.microsoft.com/office/word/2010/wordprocessingShape" xmlns:w16se="http://schemas.microsoft.com/office/word/2015/wordml/symex" xmlns:w16cid="http://schemas.microsoft.com/office/word/2016/wordml/cid" xmlns:wetp="http://schemas.microsoft.com/office/webextensions/taskpanes/2010/11" xmlns:we="http://schemas.microsoft.com/office/webextensions/webextension/2010/11" xmlns:comp="http://schemas.openxmlformats.org/drawingml/2006/compatibility" xmlns:lc="http://schemas.openxmlformats.org/drawingml/2006/lockedCanvas">
+          <c:extLst xmlns:lc="http://schemas.openxmlformats.org/drawingml/2006/lockedCanvas" xmlns:comp="http://schemas.openxmlformats.org/drawingml/2006/compatibility" xmlns:we="http://schemas.microsoft.com/office/webextensions/webextension/2010/11" xmlns:wetp="http://schemas.microsoft.com/office/webextensions/taskpanes/2010/11" xmlns:w16cid="http://schemas.microsoft.com/office/word/2016/wordml/cid" xmlns:w16se="http://schemas.microsoft.com/office/word/2015/wordml/symex" xmlns:wps="http://schemas.microsoft.com/office/word/2010/wordprocessingShape" xmlns:b="http://schemas.openxmlformats.org/officeDocument/2006/bibliography" xmlns:odgm="http://opendope.org/SmartArt/DataHierarchy" xmlns:odi="http://opendope.org/components" xmlns:oda="http://opendope.org/answers" xmlns:odq="http://opendope.org/questions" xmlns:odc="http://opendope.org/conditions" xmlns:odx="http://opendope.org/xpaths" xmlns:cppr="http://schemas.microsoft.com/office/2006/coverPageProps" xmlns:pvml="urn:schemas-microsoft-com:office:powerpoint" xmlns:w10="urn:schemas-microsoft-com:office:word" xmlns:v="urn:schemas-microsoft-com:vml" xmlns:o="urn:schemas-microsoft-com:office:office" xmlns:xvml="urn:schemas-microsoft-com:office:excel" xmlns:dsp="http://schemas.microsoft.com/office/drawing/2008/diagram" xmlns:xdr="http://schemas.openxmlformats.org/drawingml/2006/spreadsheetDrawing" xmlns:pic="http://schemas.openxmlformats.org/drawingml/2006/picture" xmlns:dgm="http://schemas.openxmlformats.org/drawingml/2006/diagram" xmlns:c14="http://schemas.microsoft.com/office/drawing/2007/8/2/chart" xmlns:cdr="http://schemas.openxmlformats.org/drawingml/2006/chartDrawing" xmlns:wne="http://schemas.microsoft.com/office/word/2006/wordml" xmlns:sl="http://schemas.openxmlformats.org/schemaLibrary/2006/main" xmlns:mc="http://schemas.openxmlformats.org/markup-compatibility/2006" xmlns:wp14="http://schemas.microsoft.com/office/word/2010/wordprocessingDrawing" xmlns:wp="http://schemas.openxmlformats.org/drawingml/2006/wordprocessingDrawing" xmlns:m="http://schemas.openxmlformats.org/officeDocument/2006/math" xmlns:w14="http://schemas.microsoft.com/office/word/2010/wordml" xmlns:w15="http://schemas.microsoft.com/office/word/2012/wordml" xmlns:w="http://schemas.openxmlformats.org/wordprocessingml/2006/main">
             <c:ext xmlns:c16="http://schemas.microsoft.com/office/drawing/2014/chart" uri="{C3380CC4-5D6E-409C-BE32-E72D297353CC}">
               <c16:uniqueId val="{00000002-6147-E74A-AA7B-5531F0E4EE0C}"/>
             </c:ext>
@@ -558,14 +558,14 @@
     </c:plotArea>
     <c:plotVisOnly val="1"/>
     <c:dispBlanksAs val="gap"/>
-    <c:extLst xmlns:w="http://schemas.openxmlformats.org/wordprocessingml/2006/main" xmlns:w15="http://schemas.microsoft.com/office/word/2012/wordml" xmlns:w14="http://schemas.microsoft.com/office/word/2010/wordml" xmlns:m="http://schemas.openxmlformats.org/officeDocument/2006/math" xmlns:wp="http://schemas.openxmlformats.org/drawingml/2006/wordprocessingDrawing" xmlns:wp14="http://schemas.microsoft.com/office/word/2010/wordprocessingDrawing" xmlns:mc="http://schemas.openxmlformats.org/markup-compatibility/2006" xmlns:sl="http://schemas.openxmlformats.org/schemaLibrary/2006/main" xmlns:wne="http://schemas.microsoft.com/office/word/2006/wordml" xmlns:cdr="http://schemas.openxmlformats.org/drawingml/2006/chartDrawing" xmlns:c14="http://schemas.microsoft.com/office/drawing/2007/8/2/chart" xmlns:dgm="http://schemas.openxmlformats.org/drawingml/2006/diagram" xmlns:pic="http://schemas.openxmlformats.org/drawingml/2006/picture" xmlns:xdr="http://schemas.openxmlformats.org/drawingml/2006/spreadsheetDrawing" xmlns:dsp="http://schemas.microsoft.com/office/drawing/2008/diagram" xmlns:xvml="urn:schemas-microsoft-com:office:excel" xmlns:o="urn:schemas-microsoft-com:office:office" xmlns:v="urn:schemas-microsoft-com:vml" xmlns:w10="urn:schemas-microsoft-com:office:word" xmlns:pvml="urn:schemas-microsoft-com:office:powerpoint" xmlns:cppr="http://schemas.microsoft.com/office/2006/coverPageProps" xmlns:odx="http://opendope.org/xpaths" xmlns:odc="http://opendope.org/conditions" xmlns:odq="http://opendope.org/questions" xmlns:oda="http://opendope.org/answers" xmlns:odi="http://opendope.org/components" xmlns:odgm="http://opendope.org/SmartArt/DataHierarchy" xmlns:b="http://schemas.openxmlformats.org/officeDocument/2006/bibliography" xmlns:wps="http://schemas.microsoft.com/office/word/2010/wordprocessingShape" xmlns:w16se="http://schemas.microsoft.com/office/word/2015/wordml/symex" xmlns:w16cid="http://schemas.microsoft.com/office/word/2016/wordml/cid" xmlns:wetp="http://schemas.microsoft.com/office/webextensions/taskpanes/2010/11" xmlns:we="http://schemas.microsoft.com/office/webextensions/webextension/2010/11" xmlns:comp="http://schemas.openxmlformats.org/drawingml/2006/compatibility" xmlns:lc="http://schemas.openxmlformats.org/drawingml/2006/lockedCanvas">
+    <c:showDLblsOverMax val="0"/>
+    <c:extLst xmlns:lc="http://schemas.openxmlformats.org/drawingml/2006/lockedCanvas" xmlns:comp="http://schemas.openxmlformats.org/drawingml/2006/compatibility" xmlns:we="http://schemas.microsoft.com/office/webextensions/webextension/2010/11" xmlns:wetp="http://schemas.microsoft.com/office/webextensions/taskpanes/2010/11" xmlns:w16cid="http://schemas.microsoft.com/office/word/2016/wordml/cid" xmlns:w16se="http://schemas.microsoft.com/office/word/2015/wordml/symex" xmlns:wps="http://schemas.microsoft.com/office/word/2010/wordprocessingShape" xmlns:b="http://schemas.openxmlformats.org/officeDocument/2006/bibliography" xmlns:odgm="http://opendope.org/SmartArt/DataHierarchy" xmlns:odi="http://opendope.org/components" xmlns:oda="http://opendope.org/answers" xmlns:odq="http://opendope.org/questions" xmlns:odc="http://opendope.org/conditions" xmlns:odx="http://opendope.org/xpaths" xmlns:cppr="http://schemas.microsoft.com/office/2006/coverPageProps" xmlns:pvml="urn:schemas-microsoft-com:office:powerpoint" xmlns:w10="urn:schemas-microsoft-com:office:word" xmlns:v="urn:schemas-microsoft-com:vml" xmlns:o="urn:schemas-microsoft-com:office:office" xmlns:xvml="urn:schemas-microsoft-com:office:excel" xmlns:dsp="http://schemas.microsoft.com/office/drawing/2008/diagram" xmlns:xdr="http://schemas.openxmlformats.org/drawingml/2006/spreadsheetDrawing" xmlns:pic="http://schemas.openxmlformats.org/drawingml/2006/picture" xmlns:dgm="http://schemas.openxmlformats.org/drawingml/2006/diagram" xmlns:c14="http://schemas.microsoft.com/office/drawing/2007/8/2/chart" xmlns:cdr="http://schemas.openxmlformats.org/drawingml/2006/chartDrawing" xmlns:wne="http://schemas.microsoft.com/office/word/2006/wordml" xmlns:sl="http://schemas.openxmlformats.org/schemaLibrary/2006/main" xmlns:mc="http://schemas.openxmlformats.org/markup-compatibility/2006" xmlns:wp14="http://schemas.microsoft.com/office/word/2010/wordprocessingDrawing" xmlns:wp="http://schemas.openxmlformats.org/drawingml/2006/wordprocessingDrawing" xmlns:m="http://schemas.openxmlformats.org/officeDocument/2006/math" xmlns:w14="http://schemas.microsoft.com/office/word/2010/wordml" xmlns:w15="http://schemas.microsoft.com/office/word/2012/wordml" xmlns:w="http://schemas.openxmlformats.org/wordprocessingml/2006/main">
       <c:ext xmlns:c16r3="http://schemas.microsoft.com/office/drawing/2017/03/chart" uri="{56B9EC1D-385E-4148-901F-78D8002777C0}">
         <c16r3:dataDisplayOptions16>
           <c16r3:dispNaAsBlank val="1"/>
         </c16r3:dataDisplayOptions16>
       </c:ext>
     </c:extLst>
-    <c:showDLblsOverMax val="0"/>
   </c:chart>
   <c:spPr>
     <a:noFill/>
@@ -661,7 +661,7 @@
                 </a:outerShdw>
               </a:effectLst>
             </c:spPr>
-            <c:extLst xmlns:lc="http://schemas.openxmlformats.org/drawingml/2006/lockedCanvas" xmlns:comp="http://schemas.openxmlformats.org/drawingml/2006/compatibility" xmlns:we="http://schemas.microsoft.com/office/webextensions/webextension/2010/11" xmlns:wetp="http://schemas.microsoft.com/office/webextensions/taskpanes/2010/11" xmlns:w16cid="http://schemas.microsoft.com/office/word/2016/wordml/cid" xmlns:w16se="http://schemas.microsoft.com/office/word/2015/wordml/symex" xmlns:wps="http://schemas.microsoft.com/office/word/2010/wordprocessingShape" xmlns:b="http://schemas.openxmlformats.org/officeDocument/2006/bibliography" xmlns:odgm="http://opendope.org/SmartArt/DataHierarchy" xmlns:odi="http://opendope.org/components" xmlns:oda="http://opendope.org/answers" xmlns:odq="http://opendope.org/questions" xmlns:odc="http://opendope.org/conditions" xmlns:odx="http://opendope.org/xpaths" xmlns:cppr="http://schemas.microsoft.com/office/2006/coverPageProps" xmlns:pvml="urn:schemas-microsoft-com:office:powerpoint" xmlns:w10="urn:schemas-microsoft-com:office:word" xmlns:v="urn:schemas-microsoft-com:vml" xmlns:o="urn:schemas-microsoft-com:office:office" xmlns:xvml="urn:schemas-microsoft-com:office:excel" xmlns:dsp="http://schemas.microsoft.com/office/drawing/2008/diagram" xmlns:xdr="http://schemas.openxmlformats.org/drawingml/2006/spreadsheetDrawing" xmlns:pic="http://schemas.openxmlformats.org/drawingml/2006/picture" xmlns:dgm="http://schemas.openxmlformats.org/drawingml/2006/diagram" xmlns:c14="http://schemas.microsoft.com/office/drawing/2007/8/2/chart" xmlns:cdr="http://schemas.openxmlformats.org/drawingml/2006/chartDrawing" xmlns:wne="http://schemas.microsoft.com/office/word/2006/wordml" xmlns:sl="http://schemas.openxmlformats.org/schemaLibrary/2006/main" xmlns:mc="http://schemas.openxmlformats.org/markup-compatibility/2006" xmlns:wp14="http://schemas.microsoft.com/office/word/2010/wordprocessingDrawing" xmlns:wp="http://schemas.openxmlformats.org/drawingml/2006/wordprocessingDrawing" xmlns:m="http://schemas.openxmlformats.org/officeDocument/2006/math" xmlns:w14="http://schemas.microsoft.com/office/word/2010/wordml" xmlns:w15="http://schemas.microsoft.com/office/word/2012/wordml" xmlns:w="http://schemas.openxmlformats.org/wordprocessingml/2006/main">
+            <c:extLst xmlns:w="http://schemas.openxmlformats.org/wordprocessingml/2006/main" xmlns:w15="http://schemas.microsoft.com/office/word/2012/wordml" xmlns:w14="http://schemas.microsoft.com/office/word/2010/wordml" xmlns:m="http://schemas.openxmlformats.org/officeDocument/2006/math" xmlns:wp="http://schemas.openxmlformats.org/drawingml/2006/wordprocessingDrawing" xmlns:wp14="http://schemas.microsoft.com/office/word/2010/wordprocessingDrawing" xmlns:mc="http://schemas.openxmlformats.org/markup-compatibility/2006" xmlns:sl="http://schemas.openxmlformats.org/schemaLibrary/2006/main" xmlns:wne="http://schemas.microsoft.com/office/word/2006/wordml" xmlns:cdr="http://schemas.openxmlformats.org/drawingml/2006/chartDrawing" xmlns:c14="http://schemas.microsoft.com/office/drawing/2007/8/2/chart" xmlns:dgm="http://schemas.openxmlformats.org/drawingml/2006/diagram" xmlns:pic="http://schemas.openxmlformats.org/drawingml/2006/picture" xmlns:xdr="http://schemas.openxmlformats.org/drawingml/2006/spreadsheetDrawing" xmlns:dsp="http://schemas.microsoft.com/office/drawing/2008/diagram" xmlns:xvml="urn:schemas-microsoft-com:office:excel" xmlns:o="urn:schemas-microsoft-com:office:office" xmlns:v="urn:schemas-microsoft-com:vml" xmlns:w10="urn:schemas-microsoft-com:office:word" xmlns:pvml="urn:schemas-microsoft-com:office:powerpoint" xmlns:cppr="http://schemas.microsoft.com/office/2006/coverPageProps" xmlns:odx="http://opendope.org/xpaths" xmlns:odc="http://opendope.org/conditions" xmlns:odq="http://opendope.org/questions" xmlns:oda="http://opendope.org/answers" xmlns:odi="http://opendope.org/components" xmlns:odgm="http://opendope.org/SmartArt/DataHierarchy" xmlns:b="http://schemas.openxmlformats.org/officeDocument/2006/bibliography" xmlns:wps="http://schemas.microsoft.com/office/word/2010/wordprocessingShape" xmlns:w16se="http://schemas.microsoft.com/office/word/2015/wordml/symex" xmlns:w16cid="http://schemas.microsoft.com/office/word/2016/wordml/cid" xmlns:wetp="http://schemas.microsoft.com/office/webextensions/taskpanes/2010/11" xmlns:we="http://schemas.microsoft.com/office/webextensions/webextension/2010/11" xmlns:comp="http://schemas.openxmlformats.org/drawingml/2006/compatibility" xmlns:lc="http://schemas.openxmlformats.org/drawingml/2006/lockedCanvas">
               <c:ext xmlns:c16="http://schemas.microsoft.com/office/drawing/2014/chart" uri="{C3380CC4-5D6E-409C-BE32-E72D297353CC}">
                 <c16:uniqueId val="{00000001-6147-E74A-AA7B-5531F0E4EE0C}"/>
               </c:ext>
@@ -744,7 +744,7 @@
               </c:numCache>
             </c:numRef>
           </c:val>
-          <c:extLst xmlns:lc="http://schemas.openxmlformats.org/drawingml/2006/lockedCanvas" xmlns:comp="http://schemas.openxmlformats.org/drawingml/2006/compatibility" xmlns:we="http://schemas.microsoft.com/office/webextensions/webextension/2010/11" xmlns:wetp="http://schemas.microsoft.com/office/webextensions/taskpanes/2010/11" xmlns:w16cid="http://schemas.microsoft.com/office/word/2016/wordml/cid" xmlns:w16se="http://schemas.microsoft.com/office/word/2015/wordml/symex" xmlns:wps="http://schemas.microsoft.com/office/word/2010/wordprocessingShape" xmlns:b="http://schemas.openxmlformats.org/officeDocument/2006/bibliography" xmlns:odgm="http://opendope.org/SmartArt/DataHierarchy" xmlns:odi="http://opendope.org/components" xmlns:oda="http://opendope.org/answers" xmlns:odq="http://opendope.org/questions" xmlns:odc="http://opendope.org/conditions" xmlns:odx="http://opendope.org/xpaths" xmlns:cppr="http://schemas.microsoft.com/office/2006/coverPageProps" xmlns:pvml="urn:schemas-microsoft-com:office:powerpoint" xmlns:w10="urn:schemas-microsoft-com:office:word" xmlns:v="urn:schemas-microsoft-com:vml" xmlns:o="urn:schemas-microsoft-com:office:office" xmlns:xvml="urn:schemas-microsoft-com:office:excel" xmlns:dsp="http://schemas.microsoft.com/office/drawing/2008/diagram" xmlns:xdr="http://schemas.openxmlformats.org/drawingml/2006/spreadsheetDrawing" xmlns:pic="http://schemas.openxmlformats.org/drawingml/2006/picture" xmlns:dgm="http://schemas.openxmlformats.org/drawingml/2006/diagram" xmlns:c14="http://schemas.microsoft.com/office/drawing/2007/8/2/chart" xmlns:cdr="http://schemas.openxmlformats.org/drawingml/2006/chartDrawing" xmlns:wne="http://schemas.microsoft.com/office/word/2006/wordml" xmlns:sl="http://schemas.openxmlformats.org/schemaLibrary/2006/main" xmlns:mc="http://schemas.openxmlformats.org/markup-compatibility/2006" xmlns:wp14="http://schemas.microsoft.com/office/word/2010/wordprocessingDrawing" xmlns:wp="http://schemas.openxmlformats.org/drawingml/2006/wordprocessingDrawing" xmlns:m="http://schemas.openxmlformats.org/officeDocument/2006/math" xmlns:w14="http://schemas.microsoft.com/office/word/2010/wordml" xmlns:w15="http://schemas.microsoft.com/office/word/2012/wordml" xmlns:w="http://schemas.openxmlformats.org/wordprocessingml/2006/main">
+          <c:extLst xmlns:w="http://schemas.openxmlformats.org/wordprocessingml/2006/main" xmlns:w15="http://schemas.microsoft.com/office/word/2012/wordml" xmlns:w14="http://schemas.microsoft.com/office/word/2010/wordml" xmlns:m="http://schemas.openxmlformats.org/officeDocument/2006/math" xmlns:wp="http://schemas.openxmlformats.org/drawingml/2006/wordprocessingDrawing" xmlns:wp14="http://schemas.microsoft.com/office/word/2010/wordprocessingDrawing" xmlns:mc="http://schemas.openxmlformats.org/markup-compatibility/2006" xmlns:sl="http://schemas.openxmlformats.org/schemaLibrary/2006/main" xmlns:wne="http://schemas.microsoft.com/office/word/2006/wordml" xmlns:cdr="http://schemas.openxmlformats.org/drawingml/2006/chartDrawing" xmlns:c14="http://schemas.microsoft.com/office/drawing/2007/8/2/chart" xmlns:dgm="http://schemas.openxmlformats.org/drawingml/2006/diagram" xmlns:pic="http://schemas.openxmlformats.org/drawingml/2006/picture" xmlns:xdr="http://schemas.openxmlformats.org/drawingml/2006/spreadsheetDrawing" xmlns:dsp="http://schemas.microsoft.com/office/drawing/2008/diagram" xmlns:xvml="urn:schemas-microsoft-com:office:excel" xmlns:o="urn:schemas-microsoft-com:office:office" xmlns:v="urn:schemas-microsoft-com:vml" xmlns:w10="urn:schemas-microsoft-com:office:word" xmlns:pvml="urn:schemas-microsoft-com:office:powerpoint" xmlns:cppr="http://schemas.microsoft.com/office/2006/coverPageProps" xmlns:odx="http://opendope.org/xpaths" xmlns:odc="http://opendope.org/conditions" xmlns:odq="http://opendope.org/questions" xmlns:oda="http://opendope.org/answers" xmlns:odi="http://opendope.org/components" xmlns:odgm="http://opendope.org/SmartArt/DataHierarchy" xmlns:b="http://schemas.openxmlformats.org/officeDocument/2006/bibliography" xmlns:wps="http://schemas.microsoft.com/office/word/2010/wordprocessingShape" xmlns:w16se="http://schemas.microsoft.com/office/word/2015/wordml/symex" xmlns:w16cid="http://schemas.microsoft.com/office/word/2016/wordml/cid" xmlns:wetp="http://schemas.microsoft.com/office/webextensions/taskpanes/2010/11" xmlns:we="http://schemas.microsoft.com/office/webextensions/webextension/2010/11" xmlns:comp="http://schemas.openxmlformats.org/drawingml/2006/compatibility" xmlns:lc="http://schemas.openxmlformats.org/drawingml/2006/lockedCanvas">
             <c:ext xmlns:c16="http://schemas.microsoft.com/office/drawing/2014/chart" uri="{C3380CC4-5D6E-409C-BE32-E72D297353CC}">
               <c16:uniqueId val="{00000002-6147-E74A-AA7B-5531F0E4EE0C}"/>
             </c:ext>
@@ -1306,14 +1306,14 @@
     </c:plotArea>
     <c:plotVisOnly val="1"/>
     <c:dispBlanksAs val="gap"/>
-    <c:extLst xmlns:lc="http://schemas.openxmlformats.org/drawingml/2006/lockedCanvas" xmlns:comp="http://schemas.openxmlformats.org/drawingml/2006/compatibility" xmlns:we="http://schemas.microsoft.com/office/webextensions/webextension/2010/11" xmlns:wetp="http://schemas.microsoft.com/office/webextensions/taskpanes/2010/11" xmlns:w16cid="http://schemas.microsoft.com/office/word/2016/wordml/cid" xmlns:w16se="http://schemas.microsoft.com/office/word/2015/wordml/symex" xmlns:wps="http://schemas.microsoft.com/office/word/2010/wordprocessingShape" xmlns:b="http://schemas.openxmlformats.org/officeDocument/2006/bibliography" xmlns:odgm="http://opendope.org/SmartArt/DataHierarchy" xmlns:odi="http://opendope.org/components" xmlns:oda="http://opendope.org/answers" xmlns:odq="http://opendope.org/questions" xmlns:odc="http://opendope.org/conditions" xmlns:odx="http://opendope.org/xpaths" xmlns:cppr="http://schemas.microsoft.com/office/2006/coverPageProps" xmlns:pvml="urn:schemas-microsoft-com:office:powerpoint" xmlns:w10="urn:schemas-microsoft-com:office:word" xmlns:v="urn:schemas-microsoft-com:vml" xmlns:o="urn:schemas-microsoft-com:office:office" xmlns:xvml="urn:schemas-microsoft-com:office:excel" xmlns:dsp="http://schemas.microsoft.com/office/drawing/2008/diagram" xmlns:xdr="http://schemas.openxmlformats.org/drawingml/2006/spreadsheetDrawing" xmlns:pic="http://schemas.openxmlformats.org/drawingml/2006/picture" xmlns:dgm="http://schemas.openxmlformats.org/drawingml/2006/diagram" xmlns:c14="http://schemas.microsoft.com/office/drawing/2007/8/2/chart" xmlns:cdr="http://schemas.openxmlformats.org/drawingml/2006/chartDrawing" xmlns:wne="http://schemas.microsoft.com/office/word/2006/wordml" xmlns:sl="http://schemas.openxmlformats.org/schemaLibrary/2006/main" xmlns:mc="http://schemas.openxmlformats.org/markup-compatibility/2006" xmlns:wp14="http://schemas.microsoft.com/office/word/2010/wordprocessingDrawing" xmlns:wp="http://schemas.openxmlformats.org/drawingml/2006/wordprocessingDrawing" xmlns:m="http://schemas.openxmlformats.org/officeDocument/2006/math" xmlns:w14="http://schemas.microsoft.com/office/word/2010/wordml" xmlns:w15="http://schemas.microsoft.com/office/word/2012/wordml" xmlns:w="http://schemas.openxmlformats.org/wordprocessingml/2006/main">
+    <c:showDLblsOverMax val="0"/>
+    <c:extLst xmlns:w="http://schemas.openxmlformats.org/wordprocessingml/2006/main" xmlns:w15="http://schemas.microsoft.com/office/word/2012/wordml" xmlns:w14="http://schemas.microsoft.com/office/word/2010/wordml" xmlns:m="http://schemas.openxmlformats.org/officeDocument/2006/math" xmlns:wp="http://schemas.openxmlformats.org/drawingml/2006/wordprocessingDrawing" xmlns:wp14="http://schemas.microsoft.com/office/word/2010/wordprocessingDrawing" xmlns:mc="http://schemas.openxmlformats.org/markup-compatibility/2006" xmlns:sl="http://schemas.openxmlformats.org/schemaLibrary/2006/main" xmlns:wne="http://schemas.microsoft.com/office/word/2006/wordml" xmlns:cdr="http://schemas.openxmlformats.org/drawingml/2006/chartDrawing" xmlns:c14="http://schemas.microsoft.com/office/drawing/2007/8/2/chart" xmlns:dgm="http://schemas.openxmlformats.org/drawingml/2006/diagram" xmlns:pic="http://schemas.openxmlformats.org/drawingml/2006/picture" xmlns:xdr="http://schemas.openxmlformats.org/drawingml/2006/spreadsheetDrawing" xmlns:dsp="http://schemas.microsoft.com/office/drawing/2008/diagram" xmlns:xvml="urn:schemas-microsoft-com:office:excel" xmlns:o="urn:schemas-microsoft-com:office:office" xmlns:v="urn:schemas-microsoft-com:vml" xmlns:w10="urn:schemas-microsoft-com:office:word" xmlns:pvml="urn:schemas-microsoft-com:office:powerpoint" xmlns:cppr="http://schemas.microsoft.com/office/2006/coverPageProps" xmlns:odx="http://opendope.org/xpaths" xmlns:odc="http://opendope.org/conditions" xmlns:odq="http://opendope.org/questions" xmlns:oda="http://opendope.org/answers" xmlns:odi="http://opendope.org/components" xmlns:odgm="http://opendope.org/SmartArt/DataHierarchy" xmlns:b="http://schemas.openxmlformats.org/officeDocument/2006/bibliography" xmlns:wps="http://schemas.microsoft.com/office/word/2010/wordprocessingShape" xmlns:w16se="http://schemas.microsoft.com/office/word/2015/wordml/symex" xmlns:w16cid="http://schemas.microsoft.com/office/word/2016/wordml/cid" xmlns:wetp="http://schemas.microsoft.com/office/webextensions/taskpanes/2010/11" xmlns:we="http://schemas.microsoft.com/office/webextensions/webextension/2010/11" xmlns:comp="http://schemas.openxmlformats.org/drawingml/2006/compatibility" xmlns:lc="http://schemas.openxmlformats.org/drawingml/2006/lockedCanvas">
       <c:ext xmlns:c16r3="http://schemas.microsoft.com/office/drawing/2017/03/chart" uri="{56B9EC1D-385E-4148-901F-78D8002777C0}">
         <c16r3:dataDisplayOptions16>
           <c16r3:dispNaAsBlank val="1"/>
         </c16r3:dataDisplayOptions16>
       </c:ext>
     </c:extLst>
-    <c:showDLblsOverMax val="0"/>
   </c:chart>
   <c:spPr>
     <a:noFill/>
@@ -1409,7 +1409,7 @@
                 </a:outerShdw>
               </a:effectLst>
             </c:spPr>
-            <c:extLst xmlns:w="http://schemas.openxmlformats.org/wordprocessingml/2006/main" xmlns:w15="http://schemas.microsoft.com/office/word/2012/wordml" xmlns:w14="http://schemas.microsoft.com/office/word/2010/wordml" xmlns:m="http://schemas.openxmlformats.org/officeDocument/2006/math" xmlns:wp="http://schemas.openxmlformats.org/drawingml/2006/wordprocessingDrawing" xmlns:wp14="http://schemas.microsoft.com/office/word/2010/wordprocessingDrawing" xmlns:mc="http://schemas.openxmlformats.org/markup-compatibility/2006" xmlns:sl="http://schemas.openxmlformats.org/schemaLibrary/2006/main" xmlns:wne="http://schemas.microsoft.com/office/word/2006/wordml" xmlns:cdr="http://schemas.openxmlformats.org/drawingml/2006/chartDrawing" xmlns:c14="http://schemas.microsoft.com/office/drawing/2007/8/2/chart" xmlns:dgm="http://schemas.openxmlformats.org/drawingml/2006/diagram" xmlns:pic="http://schemas.openxmlformats.org/drawingml/2006/picture" xmlns:xdr="http://schemas.openxmlformats.org/drawingml/2006/spreadsheetDrawing" xmlns:dsp="http://schemas.microsoft.com/office/drawing/2008/diagram" xmlns:xvml="urn:schemas-microsoft-com:office:excel" xmlns:o="urn:schemas-microsoft-com:office:office" xmlns:v="urn:schemas-microsoft-com:vml" xmlns:w10="urn:schemas-microsoft-com:office:word" xmlns:pvml="urn:schemas-microsoft-com:office:powerpoint" xmlns:cppr="http://schemas.microsoft.com/office/2006/coverPageProps" xmlns:odx="http://opendope.org/xpaths" xmlns:odc="http://opendope.org/conditions" xmlns:odq="http://opendope.org/questions" xmlns:oda="http://opendope.org/answers" xmlns:odi="http://opendope.org/components" xmlns:odgm="http://opendope.org/SmartArt/DataHierarchy" xmlns:b="http://schemas.openxmlformats.org/officeDocument/2006/bibliography" xmlns:wps="http://schemas.microsoft.com/office/word/2010/wordprocessingShape" xmlns:w16se="http://schemas.microsoft.com/office/word/2015/wordml/symex" xmlns:w16cid="http://schemas.microsoft.com/office/word/2016/wordml/cid" xmlns:wetp="http://schemas.microsoft.com/office/webextensions/taskpanes/2010/11" xmlns:we="http://schemas.microsoft.com/office/webextensions/webextension/2010/11" xmlns:comp="http://schemas.openxmlformats.org/drawingml/2006/compatibility" xmlns:lc="http://schemas.openxmlformats.org/drawingml/2006/lockedCanvas">
+            <c:extLst xmlns:lc="http://schemas.openxmlformats.org/drawingml/2006/lockedCanvas" xmlns:comp="http://schemas.openxmlformats.org/drawingml/2006/compatibility" xmlns:we="http://schemas.microsoft.com/office/webextensions/webextension/2010/11" xmlns:wetp="http://schemas.microsoft.com/office/webextensions/taskpanes/2010/11" xmlns:w16cid="http://schemas.microsoft.com/office/word/2016/wordml/cid" xmlns:w16se="http://schemas.microsoft.com/office/word/2015/wordml/symex" xmlns:wps="http://schemas.microsoft.com/office/word/2010/wordprocessingShape" xmlns:b="http://schemas.openxmlformats.org/officeDocument/2006/bibliography" xmlns:odgm="http://opendope.org/SmartArt/DataHierarchy" xmlns:odi="http://opendope.org/components" xmlns:oda="http://opendope.org/answers" xmlns:odq="http://opendope.org/questions" xmlns:odc="http://opendope.org/conditions" xmlns:odx="http://opendope.org/xpaths" xmlns:cppr="http://schemas.microsoft.com/office/2006/coverPageProps" xmlns:pvml="urn:schemas-microsoft-com:office:powerpoint" xmlns:w10="urn:schemas-microsoft-com:office:word" xmlns:v="urn:schemas-microsoft-com:vml" xmlns:o="urn:schemas-microsoft-com:office:office" xmlns:xvml="urn:schemas-microsoft-com:office:excel" xmlns:dsp="http://schemas.microsoft.com/office/drawing/2008/diagram" xmlns:xdr="http://schemas.openxmlformats.org/drawingml/2006/spreadsheetDrawing" xmlns:pic="http://schemas.openxmlformats.org/drawingml/2006/picture" xmlns:dgm="http://schemas.openxmlformats.org/drawingml/2006/diagram" xmlns:c14="http://schemas.microsoft.com/office/drawing/2007/8/2/chart" xmlns:cdr="http://schemas.openxmlformats.org/drawingml/2006/chartDrawing" xmlns:wne="http://schemas.microsoft.com/office/word/2006/wordml" xmlns:sl="http://schemas.openxmlformats.org/schemaLibrary/2006/main" xmlns:mc="http://schemas.openxmlformats.org/markup-compatibility/2006" xmlns:wp14="http://schemas.microsoft.com/office/word/2010/wordprocessingDrawing" xmlns:wp="http://schemas.openxmlformats.org/drawingml/2006/wordprocessingDrawing" xmlns:m="http://schemas.openxmlformats.org/officeDocument/2006/math" xmlns:w14="http://schemas.microsoft.com/office/word/2010/wordml" xmlns:w15="http://schemas.microsoft.com/office/word/2012/wordml" xmlns:w="http://schemas.openxmlformats.org/wordprocessingml/2006/main">
               <c:ext xmlns:c16="http://schemas.microsoft.com/office/drawing/2014/chart" uri="{C3380CC4-5D6E-409C-BE32-E72D297353CC}">
                 <c16:uniqueId val="{00000001-6147-E74A-AA7B-5531F0E4EE0C}"/>
               </c:ext>
@@ -1492,7 +1492,7 @@
               </c:numCache>
             </c:numRef>
           </c:val>
-          <c:extLst xmlns:w="http://schemas.openxmlformats.org/wordprocessingml/2006/main" xmlns:w15="http://schemas.microsoft.com/office/word/2012/wordml" xmlns:w14="http://schemas.microsoft.com/office/word/2010/wordml" xmlns:m="http://schemas.openxmlformats.org/officeDocument/2006/math" xmlns:wp="http://schemas.openxmlformats.org/drawingml/2006/wordprocessingDrawing" xmlns:wp14="http://schemas.microsoft.com/office/word/2010/wordprocessingDrawing" xmlns:mc="http://schemas.openxmlformats.org/markup-compatibility/2006" xmlns:sl="http://schemas.openxmlformats.org/schemaLibrary/2006/main" xmlns:wne="http://schemas.microsoft.com/office/word/2006/wordml" xmlns:cdr="http://schemas.openxmlformats.org/drawingml/2006/chartDrawing" xmlns:c14="http://schemas.microsoft.com/office/drawing/2007/8/2/chart" xmlns:dgm="http://schemas.openxmlformats.org/drawingml/2006/diagram" xmlns:pic="http://schemas.openxmlformats.org/drawingml/2006/picture" xmlns:xdr="http://schemas.openxmlformats.org/drawingml/2006/spreadsheetDrawing" xmlns:dsp="http://schemas.microsoft.com/office/drawing/2008/diagram" xmlns:xvml="urn:schemas-microsoft-com:office:excel" xmlns:o="urn:schemas-microsoft-com:office:office" xmlns:v="urn:schemas-microsoft-com:vml" xmlns:w10="urn:schemas-microsoft-com:office:word" xmlns:pvml="urn:schemas-microsoft-com:office:powerpoint" xmlns:cppr="http://schemas.microsoft.com/office/2006/coverPageProps" xmlns:odx="http://opendope.org/xpaths" xmlns:odc="http://opendope.org/conditions" xmlns:odq="http://opendope.org/questions" xmlns:oda="http://opendope.org/answers" xmlns:odi="http://opendope.org/components" xmlns:odgm="http://opendope.org/SmartArt/DataHierarchy" xmlns:b="http://schemas.openxmlformats.org/officeDocument/2006/bibliography" xmlns:wps="http://schemas.microsoft.com/office/word/2010/wordprocessingShape" xmlns:w16se="http://schemas.microsoft.com/office/word/2015/wordml/symex" xmlns:w16cid="http://schemas.microsoft.com/office/word/2016/wordml/cid" xmlns:wetp="http://schemas.microsoft.com/office/webextensions/taskpanes/2010/11" xmlns:we="http://schemas.microsoft.com/office/webextensions/webextension/2010/11" xmlns:comp="http://schemas.openxmlformats.org/drawingml/2006/compatibility" xmlns:lc="http://schemas.openxmlformats.org/drawingml/2006/lockedCanvas">
+          <c:extLst xmlns:lc="http://schemas.openxmlformats.org/drawingml/2006/lockedCanvas" xmlns:comp="http://schemas.openxmlformats.org/drawingml/2006/compatibility" xmlns:we="http://schemas.microsoft.com/office/webextensions/webextension/2010/11" xmlns:wetp="http://schemas.microsoft.com/office/webextensions/taskpanes/2010/11" xmlns:w16cid="http://schemas.microsoft.com/office/word/2016/wordml/cid" xmlns:w16se="http://schemas.microsoft.com/office/word/2015/wordml/symex" xmlns:wps="http://schemas.microsoft.com/office/word/2010/wordprocessingShape" xmlns:b="http://schemas.openxmlformats.org/officeDocument/2006/bibliography" xmlns:odgm="http://opendope.org/SmartArt/DataHierarchy" xmlns:odi="http://opendope.org/components" xmlns:oda="http://opendope.org/answers" xmlns:odq="http://opendope.org/questions" xmlns:odc="http://opendope.org/conditions" xmlns:odx="http://opendope.org/xpaths" xmlns:cppr="http://schemas.microsoft.com/office/2006/coverPageProps" xmlns:pvml="urn:schemas-microsoft-com:office:powerpoint" xmlns:w10="urn:schemas-microsoft-com:office:word" xmlns:v="urn:schemas-microsoft-com:vml" xmlns:o="urn:schemas-microsoft-com:office:office" xmlns:xvml="urn:schemas-microsoft-com:office:excel" xmlns:dsp="http://schemas.microsoft.com/office/drawing/2008/diagram" xmlns:xdr="http://schemas.openxmlformats.org/drawingml/2006/spreadsheetDrawing" xmlns:pic="http://schemas.openxmlformats.org/drawingml/2006/picture" xmlns:dgm="http://schemas.openxmlformats.org/drawingml/2006/diagram" xmlns:c14="http://schemas.microsoft.com/office/drawing/2007/8/2/chart" xmlns:cdr="http://schemas.openxmlformats.org/drawingml/2006/chartDrawing" xmlns:wne="http://schemas.microsoft.com/office/word/2006/wordml" xmlns:sl="http://schemas.openxmlformats.org/schemaLibrary/2006/main" xmlns:mc="http://schemas.openxmlformats.org/markup-compatibility/2006" xmlns:wp14="http://schemas.microsoft.com/office/word/2010/wordprocessingDrawing" xmlns:wp="http://schemas.openxmlformats.org/drawingml/2006/wordprocessingDrawing" xmlns:m="http://schemas.openxmlformats.org/officeDocument/2006/math" xmlns:w14="http://schemas.microsoft.com/office/word/2010/wordml" xmlns:w15="http://schemas.microsoft.com/office/word/2012/wordml" xmlns:w="http://schemas.openxmlformats.org/wordprocessingml/2006/main">
             <c:ext xmlns:c16="http://schemas.microsoft.com/office/drawing/2014/chart" uri="{C3380CC4-5D6E-409C-BE32-E72D297353CC}">
               <c16:uniqueId val="{00000002-6147-E74A-AA7B-5531F0E4EE0C}"/>
             </c:ext>
@@ -2054,14 +2054,14 @@
     </c:plotArea>
     <c:plotVisOnly val="1"/>
     <c:dispBlanksAs val="gap"/>
-    <c:extLst xmlns:w="http://schemas.openxmlformats.org/wordprocessingml/2006/main" xmlns:w15="http://schemas.microsoft.com/office/word/2012/wordml" xmlns:w14="http://schemas.microsoft.com/office/word/2010/wordml" xmlns:m="http://schemas.openxmlformats.org/officeDocument/2006/math" xmlns:wp="http://schemas.openxmlformats.org/drawingml/2006/wordprocessingDrawing" xmlns:wp14="http://schemas.microsoft.com/office/word/2010/wordprocessingDrawing" xmlns:mc="http://schemas.openxmlformats.org/markup-compatibility/2006" xmlns:sl="http://schemas.openxmlformats.org/schemaLibrary/2006/main" xmlns:wne="http://schemas.microsoft.com/office/word/2006/wordml" xmlns:cdr="http://schemas.openxmlformats.org/drawingml/2006/chartDrawing" xmlns:c14="http://schemas.microsoft.com/office/drawing/2007/8/2/chart" xmlns:dgm="http://schemas.openxmlformats.org/drawingml/2006/diagram" xmlns:pic="http://schemas.openxmlformats.org/drawingml/2006/picture" xmlns:xdr="http://schemas.openxmlformats.org/drawingml/2006/spreadsheetDrawing" xmlns:dsp="http://schemas.microsoft.com/office/drawing/2008/diagram" xmlns:xvml="urn:schemas-microsoft-com:office:excel" xmlns:o="urn:schemas-microsoft-com:office:office" xmlns:v="urn:schemas-microsoft-com:vml" xmlns:w10="urn:schemas-microsoft-com:office:word" xmlns:pvml="urn:schemas-microsoft-com:office:powerpoint" xmlns:cppr="http://schemas.microsoft.com/office/2006/coverPageProps" xmlns:odx="http://opendope.org/xpaths" xmlns:odc="http://opendope.org/conditions" xmlns:odq="http://opendope.org/questions" xmlns:oda="http://opendope.org/answers" xmlns:odi="http://opendope.org/components" xmlns:odgm="http://opendope.org/SmartArt/DataHierarchy" xmlns:b="http://schemas.openxmlformats.org/officeDocument/2006/bibliography" xmlns:wps="http://schemas.microsoft.com/office/word/2010/wordprocessingShape" xmlns:w16se="http://schemas.microsoft.com/office/word/2015/wordml/symex" xmlns:w16cid="http://schemas.microsoft.com/office/word/2016/wordml/cid" xmlns:wetp="http://schemas.microsoft.com/office/webextensions/taskpanes/2010/11" xmlns:we="http://schemas.microsoft.com/office/webextensions/webextension/2010/11" xmlns:comp="http://schemas.openxmlformats.org/drawingml/2006/compatibility" xmlns:lc="http://schemas.openxmlformats.org/drawingml/2006/lockedCanvas">
+    <c:showDLblsOverMax val="0"/>
+    <c:extLst xmlns:lc="http://schemas.openxmlformats.org/drawingml/2006/lockedCanvas" xmlns:comp="http://schemas.openxmlformats.org/drawingml/2006/compatibility" xmlns:we="http://schemas.microsoft.com/office/webextensions/webextension/2010/11" xmlns:wetp="http://schemas.microsoft.com/office/webextensions/taskpanes/2010/11" xmlns:w16cid="http://schemas.microsoft.com/office/word/2016/wordml/cid" xmlns:w16se="http://schemas.microsoft.com/office/word/2015/wordml/symex" xmlns:wps="http://schemas.microsoft.com/office/word/2010/wordprocessingShape" xmlns:b="http://schemas.openxmlformats.org/officeDocument/2006/bibliography" xmlns:odgm="http://opendope.org/SmartArt/DataHierarchy" xmlns:odi="http://opendope.org/components" xmlns:oda="http://opendope.org/answers" xmlns:odq="http://opendope.org/questions" xmlns:odc="http://opendope.org/conditions" xmlns:odx="http://opendope.org/xpaths" xmlns:cppr="http://schemas.microsoft.com/office/2006/coverPageProps" xmlns:pvml="urn:schemas-microsoft-com:office:powerpoint" xmlns:w10="urn:schemas-microsoft-com:office:word" xmlns:v="urn:schemas-microsoft-com:vml" xmlns:o="urn:schemas-microsoft-com:office:office" xmlns:xvml="urn:schemas-microsoft-com:office:excel" xmlns:dsp="http://schemas.microsoft.com/office/drawing/2008/diagram" xmlns:xdr="http://schemas.openxmlformats.org/drawingml/2006/spreadsheetDrawing" xmlns:pic="http://schemas.openxmlformats.org/drawingml/2006/picture" xmlns:dgm="http://schemas.openxmlformats.org/drawingml/2006/diagram" xmlns:c14="http://schemas.microsoft.com/office/drawing/2007/8/2/chart" xmlns:cdr="http://schemas.openxmlformats.org/drawingml/2006/chartDrawing" xmlns:wne="http://schemas.microsoft.com/office/word/2006/wordml" xmlns:sl="http://schemas.openxmlformats.org/schemaLibrary/2006/main" xmlns:mc="http://schemas.openxmlformats.org/markup-compatibility/2006" xmlns:wp14="http://schemas.microsoft.com/office/word/2010/wordprocessingDrawing" xmlns:wp="http://schemas.openxmlformats.org/drawingml/2006/wordprocessingDrawing" xmlns:m="http://schemas.openxmlformats.org/officeDocument/2006/math" xmlns:w14="http://schemas.microsoft.com/office/word/2010/wordml" xmlns:w15="http://schemas.microsoft.com/office/word/2012/wordml" xmlns:w="http://schemas.openxmlformats.org/wordprocessingml/2006/main">
       <c:ext xmlns:c16r3="http://schemas.microsoft.com/office/drawing/2017/03/chart" uri="{56B9EC1D-385E-4148-901F-78D8002777C0}">
         <c16r3:dataDisplayOptions16>
           <c16r3:dispNaAsBlank val="1"/>
         </c16r3:dataDisplayOptions16>
       </c:ext>
     </c:extLst>
-    <c:showDLblsOverMax val="0"/>
   </c:chart>
   <c:spPr>
     <a:noFill/>
@@ -2157,7 +2157,7 @@
                 </a:outerShdw>
               </a:effectLst>
             </c:spPr>
-            <c:extLst xmlns:lc="http://schemas.openxmlformats.org/drawingml/2006/lockedCanvas" xmlns:comp="http://schemas.openxmlformats.org/drawingml/2006/compatibility" xmlns:we="http://schemas.microsoft.com/office/webextensions/webextension/2010/11" xmlns:wetp="http://schemas.microsoft.com/office/webextensions/taskpanes/2010/11" xmlns:w16cid="http://schemas.microsoft.com/office/word/2016/wordml/cid" xmlns:w16se="http://schemas.microsoft.com/office/word/2015/wordml/symex" xmlns:wps="http://schemas.microsoft.com/office/word/2010/wordprocessingShape" xmlns:b="http://schemas.openxmlformats.org/officeDocument/2006/bibliography" xmlns:odgm="http://opendope.org/SmartArt/DataHierarchy" xmlns:odi="http://opendope.org/components" xmlns:oda="http://opendope.org/answers" xmlns:odq="http://opendope.org/questions" xmlns:odc="http://opendope.org/conditions" xmlns:odx="http://opendope.org/xpaths" xmlns:cppr="http://schemas.microsoft.com/office/2006/coverPageProps" xmlns:pvml="urn:schemas-microsoft-com:office:powerpoint" xmlns:w10="urn:schemas-microsoft-com:office:word" xmlns:v="urn:schemas-microsoft-com:vml" xmlns:o="urn:schemas-microsoft-com:office:office" xmlns:xvml="urn:schemas-microsoft-com:office:excel" xmlns:dsp="http://schemas.microsoft.com/office/drawing/2008/diagram" xmlns:xdr="http://schemas.openxmlformats.org/drawingml/2006/spreadsheetDrawing" xmlns:pic="http://schemas.openxmlformats.org/drawingml/2006/picture" xmlns:dgm="http://schemas.openxmlformats.org/drawingml/2006/diagram" xmlns:c14="http://schemas.microsoft.com/office/drawing/2007/8/2/chart" xmlns:cdr="http://schemas.openxmlformats.org/drawingml/2006/chartDrawing" xmlns:wne="http://schemas.microsoft.com/office/word/2006/wordml" xmlns:sl="http://schemas.openxmlformats.org/schemaLibrary/2006/main" xmlns:mc="http://schemas.openxmlformats.org/markup-compatibility/2006" xmlns:wp14="http://schemas.microsoft.com/office/word/2010/wordprocessingDrawing" xmlns:wp="http://schemas.openxmlformats.org/drawingml/2006/wordprocessingDrawing" xmlns:m="http://schemas.openxmlformats.org/officeDocument/2006/math" xmlns:w14="http://schemas.microsoft.com/office/word/2010/wordml" xmlns:w15="http://schemas.microsoft.com/office/word/2012/wordml" xmlns:w="http://schemas.openxmlformats.org/wordprocessingml/2006/main">
+            <c:extLst xmlns:w="http://schemas.openxmlformats.org/wordprocessingml/2006/main" xmlns:w15="http://schemas.microsoft.com/office/word/2012/wordml" xmlns:w14="http://schemas.microsoft.com/office/word/2010/wordml" xmlns:m="http://schemas.openxmlformats.org/officeDocument/2006/math" xmlns:wp="http://schemas.openxmlformats.org/drawingml/2006/wordprocessingDrawing" xmlns:wp14="http://schemas.microsoft.com/office/word/2010/wordprocessingDrawing" xmlns:mc="http://schemas.openxmlformats.org/markup-compatibility/2006" xmlns:sl="http://schemas.openxmlformats.org/schemaLibrary/2006/main" xmlns:wne="http://schemas.microsoft.com/office/word/2006/wordml" xmlns:cdr="http://schemas.openxmlformats.org/drawingml/2006/chartDrawing" xmlns:c14="http://schemas.microsoft.com/office/drawing/2007/8/2/chart" xmlns:dgm="http://schemas.openxmlformats.org/drawingml/2006/diagram" xmlns:pic="http://schemas.openxmlformats.org/drawingml/2006/picture" xmlns:xdr="http://schemas.openxmlformats.org/drawingml/2006/spreadsheetDrawing" xmlns:dsp="http://schemas.microsoft.com/office/drawing/2008/diagram" xmlns:xvml="urn:schemas-microsoft-com:office:excel" xmlns:o="urn:schemas-microsoft-com:office:office" xmlns:v="urn:schemas-microsoft-com:vml" xmlns:w10="urn:schemas-microsoft-com:office:word" xmlns:pvml="urn:schemas-microsoft-com:office:powerpoint" xmlns:cppr="http://schemas.microsoft.com/office/2006/coverPageProps" xmlns:odx="http://opendope.org/xpaths" xmlns:odc="http://opendope.org/conditions" xmlns:odq="http://opendope.org/questions" xmlns:oda="http://opendope.org/answers" xmlns:odi="http://opendope.org/components" xmlns:odgm="http://opendope.org/SmartArt/DataHierarchy" xmlns:b="http://schemas.openxmlformats.org/officeDocument/2006/bibliography" xmlns:wps="http://schemas.microsoft.com/office/word/2010/wordprocessingShape" xmlns:w16se="http://schemas.microsoft.com/office/word/2015/wordml/symex" xmlns:w16cid="http://schemas.microsoft.com/office/word/2016/wordml/cid" xmlns:wetp="http://schemas.microsoft.com/office/webextensions/taskpanes/2010/11" xmlns:we="http://schemas.microsoft.com/office/webextensions/webextension/2010/11" xmlns:comp="http://schemas.openxmlformats.org/drawingml/2006/compatibility" xmlns:lc="http://schemas.openxmlformats.org/drawingml/2006/lockedCanvas">
               <c:ext xmlns:c16="http://schemas.microsoft.com/office/drawing/2014/chart" uri="{C3380CC4-5D6E-409C-BE32-E72D297353CC}">
                 <c16:uniqueId val="{00000001-6147-E74A-AA7B-5531F0E4EE0C}"/>
               </c:ext>
@@ -2252,7 +2252,7 @@
               </c:numCache>
             </c:numRef>
           </c:val>
-          <c:extLst xmlns:lc="http://schemas.openxmlformats.org/drawingml/2006/lockedCanvas" xmlns:comp="http://schemas.openxmlformats.org/drawingml/2006/compatibility" xmlns:we="http://schemas.microsoft.com/office/webextensions/webextension/2010/11" xmlns:wetp="http://schemas.microsoft.com/office/webextensions/taskpanes/2010/11" xmlns:w16cid="http://schemas.microsoft.com/office/word/2016/wordml/cid" xmlns:w16se="http://schemas.microsoft.com/office/word/2015/wordml/symex" xmlns:wps="http://schemas.microsoft.com/office/word/2010/wordprocessingShape" xmlns:b="http://schemas.openxmlformats.org/officeDocument/2006/bibliography" xmlns:odgm="http://opendope.org/SmartArt/DataHierarchy" xmlns:odi="http://opendope.org/components" xmlns:oda="http://opendope.org/answers" xmlns:odq="http://opendope.org/questions" xmlns:odc="http://opendope.org/conditions" xmlns:odx="http://opendope.org/xpaths" xmlns:cppr="http://schemas.microsoft.com/office/2006/coverPageProps" xmlns:pvml="urn:schemas-microsoft-com:office:powerpoint" xmlns:w10="urn:schemas-microsoft-com:office:word" xmlns:v="urn:schemas-microsoft-com:vml" xmlns:o="urn:schemas-microsoft-com:office:office" xmlns:xvml="urn:schemas-microsoft-com:office:excel" xmlns:dsp="http://schemas.microsoft.com/office/drawing/2008/diagram" xmlns:xdr="http://schemas.openxmlformats.org/drawingml/2006/spreadsheetDrawing" xmlns:pic="http://schemas.openxmlformats.org/drawingml/2006/picture" xmlns:dgm="http://schemas.openxmlformats.org/drawingml/2006/diagram" xmlns:c14="http://schemas.microsoft.com/office/drawing/2007/8/2/chart" xmlns:cdr="http://schemas.openxmlformats.org/drawingml/2006/chartDrawing" xmlns:wne="http://schemas.microsoft.com/office/word/2006/wordml" xmlns:sl="http://schemas.openxmlformats.org/schemaLibrary/2006/main" xmlns:mc="http://schemas.openxmlformats.org/markup-compatibility/2006" xmlns:wp14="http://schemas.microsoft.com/office/word/2010/wordprocessingDrawing" xmlns:wp="http://schemas.openxmlformats.org/drawingml/2006/wordprocessingDrawing" xmlns:m="http://schemas.openxmlformats.org/officeDocument/2006/math" xmlns:w14="http://schemas.microsoft.com/office/word/2010/wordml" xmlns:w15="http://schemas.microsoft.com/office/word/2012/wordml" xmlns:w="http://schemas.openxmlformats.org/wordprocessingml/2006/main">
+          <c:extLst xmlns:w="http://schemas.openxmlformats.org/wordprocessingml/2006/main" xmlns:w15="http://schemas.microsoft.com/office/word/2012/wordml" xmlns:w14="http://schemas.microsoft.com/office/word/2010/wordml" xmlns:m="http://schemas.openxmlformats.org/officeDocument/2006/math" xmlns:wp="http://schemas.openxmlformats.org/drawingml/2006/wordprocessingDrawing" xmlns:wp14="http://schemas.microsoft.com/office/word/2010/wordprocessingDrawing" xmlns:mc="http://schemas.openxmlformats.org/markup-compatibility/2006" xmlns:sl="http://schemas.openxmlformats.org/schemaLibrary/2006/main" xmlns:wne="http://schemas.microsoft.com/office/word/2006/wordml" xmlns:cdr="http://schemas.openxmlformats.org/drawingml/2006/chartDrawing" xmlns:c14="http://schemas.microsoft.com/office/drawing/2007/8/2/chart" xmlns:dgm="http://schemas.openxmlformats.org/drawingml/2006/diagram" xmlns:pic="http://schemas.openxmlformats.org/drawingml/2006/picture" xmlns:xdr="http://schemas.openxmlformats.org/drawingml/2006/spreadsheetDrawing" xmlns:dsp="http://schemas.microsoft.com/office/drawing/2008/diagram" xmlns:xvml="urn:schemas-microsoft-com:office:excel" xmlns:o="urn:schemas-microsoft-com:office:office" xmlns:v="urn:schemas-microsoft-com:vml" xmlns:w10="urn:schemas-microsoft-com:office:word" xmlns:pvml="urn:schemas-microsoft-com:office:powerpoint" xmlns:cppr="http://schemas.microsoft.com/office/2006/coverPageProps" xmlns:odx="http://opendope.org/xpaths" xmlns:odc="http://opendope.org/conditions" xmlns:odq="http://opendope.org/questions" xmlns:oda="http://opendope.org/answers" xmlns:odi="http://opendope.org/components" xmlns:odgm="http://opendope.org/SmartArt/DataHierarchy" xmlns:b="http://schemas.openxmlformats.org/officeDocument/2006/bibliography" xmlns:wps="http://schemas.microsoft.com/office/word/2010/wordprocessingShape" xmlns:w16se="http://schemas.microsoft.com/office/word/2015/wordml/symex" xmlns:w16cid="http://schemas.microsoft.com/office/word/2016/wordml/cid" xmlns:wetp="http://schemas.microsoft.com/office/webextensions/taskpanes/2010/11" xmlns:we="http://schemas.microsoft.com/office/webextensions/webextension/2010/11" xmlns:comp="http://schemas.openxmlformats.org/drawingml/2006/compatibility" xmlns:lc="http://schemas.openxmlformats.org/drawingml/2006/lockedCanvas">
             <c:ext xmlns:c16="http://schemas.microsoft.com/office/drawing/2014/chart" uri="{C3380CC4-5D6E-409C-BE32-E72D297353CC}">
               <c16:uniqueId val="{00000002-6147-E74A-AA7B-5531F0E4EE0C}"/>
             </c:ext>
@@ -2862,14 +2862,14 @@
     </c:plotArea>
     <c:plotVisOnly val="1"/>
     <c:dispBlanksAs val="gap"/>
-    <c:extLst xmlns:lc="http://schemas.openxmlformats.org/drawingml/2006/lockedCanvas" xmlns:comp="http://schemas.openxmlformats.org/drawingml/2006/compatibility" xmlns:we="http://schemas.microsoft.com/office/webextensions/webextension/2010/11" xmlns:wetp="http://schemas.microsoft.com/office/webextensions/taskpanes/2010/11" xmlns:w16cid="http://schemas.microsoft.com/office/word/2016/wordml/cid" xmlns:w16se="http://schemas.microsoft.com/office/word/2015/wordml/symex" xmlns:wps="http://schemas.microsoft.com/office/word/2010/wordprocessingShape" xmlns:b="http://schemas.openxmlformats.org/officeDocument/2006/bibliography" xmlns:odgm="http://opendope.org/SmartArt/DataHierarchy" xmlns:odi="http://opendope.org/components" xmlns:oda="http://opendope.org/answers" xmlns:odq="http://opendope.org/questions" xmlns:odc="http://opendope.org/conditions" xmlns:odx="http://opendope.org/xpaths" xmlns:cppr="http://schemas.microsoft.com/office/2006/coverPageProps" xmlns:pvml="urn:schemas-microsoft-com:office:powerpoint" xmlns:w10="urn:schemas-microsoft-com:office:word" xmlns:v="urn:schemas-microsoft-com:vml" xmlns:o="urn:schemas-microsoft-com:office:office" xmlns:xvml="urn:schemas-microsoft-com:office:excel" xmlns:dsp="http://schemas.microsoft.com/office/drawing/2008/diagram" xmlns:xdr="http://schemas.openxmlformats.org/drawingml/2006/spreadsheetDrawing" xmlns:pic="http://schemas.openxmlformats.org/drawingml/2006/picture" xmlns:dgm="http://schemas.openxmlformats.org/drawingml/2006/diagram" xmlns:c14="http://schemas.microsoft.com/office/drawing/2007/8/2/chart" xmlns:cdr="http://schemas.openxmlformats.org/drawingml/2006/chartDrawing" xmlns:wne="http://schemas.microsoft.com/office/word/2006/wordml" xmlns:sl="http://schemas.openxmlformats.org/schemaLibrary/2006/main" xmlns:mc="http://schemas.openxmlformats.org/markup-compatibility/2006" xmlns:wp14="http://schemas.microsoft.com/office/word/2010/wordprocessingDrawing" xmlns:wp="http://schemas.openxmlformats.org/drawingml/2006/wordprocessingDrawing" xmlns:m="http://schemas.openxmlformats.org/officeDocument/2006/math" xmlns:w14="http://schemas.microsoft.com/office/word/2010/wordml" xmlns:w15="http://schemas.microsoft.com/office/word/2012/wordml" xmlns:w="http://schemas.openxmlformats.org/wordprocessingml/2006/main">
+    <c:showDLblsOverMax val="0"/>
+    <c:extLst xmlns:w="http://schemas.openxmlformats.org/wordprocessingml/2006/main" xmlns:w15="http://schemas.microsoft.com/office/word/2012/wordml" xmlns:w14="http://schemas.microsoft.com/office/word/2010/wordml" xmlns:m="http://schemas.openxmlformats.org/officeDocument/2006/math" xmlns:wp="http://schemas.openxmlformats.org/drawingml/2006/wordprocessingDrawing" xmlns:wp14="http://schemas.microsoft.com/office/word/2010/wordprocessingDrawing" xmlns:mc="http://schemas.openxmlformats.org/markup-compatibility/2006" xmlns:sl="http://schemas.openxmlformats.org/schemaLibrary/2006/main" xmlns:wne="http://schemas.microsoft.com/office/word/2006/wordml" xmlns:cdr="http://schemas.openxmlformats.org/drawingml/2006/chartDrawing" xmlns:c14="http://schemas.microsoft.com/office/drawing/2007/8/2/chart" xmlns:dgm="http://schemas.openxmlformats.org/drawingml/2006/diagram" xmlns:pic="http://schemas.openxmlformats.org/drawingml/2006/picture" xmlns:xdr="http://schemas.openxmlformats.org/drawingml/2006/spreadsheetDrawing" xmlns:dsp="http://schemas.microsoft.com/office/drawing/2008/diagram" xmlns:xvml="urn:schemas-microsoft-com:office:excel" xmlns:o="urn:schemas-microsoft-com:office:office" xmlns:v="urn:schemas-microsoft-com:vml" xmlns:w10="urn:schemas-microsoft-com:office:word" xmlns:pvml="urn:schemas-microsoft-com:office:powerpoint" xmlns:cppr="http://schemas.microsoft.com/office/2006/coverPageProps" xmlns:odx="http://opendope.org/xpaths" xmlns:odc="http://opendope.org/conditions" xmlns:odq="http://opendope.org/questions" xmlns:oda="http://opendope.org/answers" xmlns:odi="http://opendope.org/components" xmlns:odgm="http://opendope.org/SmartArt/DataHierarchy" xmlns:b="http://schemas.openxmlformats.org/officeDocument/2006/bibliography" xmlns:wps="http://schemas.microsoft.com/office/word/2010/wordprocessingShape" xmlns:w16se="http://schemas.microsoft.com/office/word/2015/wordml/symex" xmlns:w16cid="http://schemas.microsoft.com/office/word/2016/wordml/cid" xmlns:wetp="http://schemas.microsoft.com/office/webextensions/taskpanes/2010/11" xmlns:we="http://schemas.microsoft.com/office/webextensions/webextension/2010/11" xmlns:comp="http://schemas.openxmlformats.org/drawingml/2006/compatibility" xmlns:lc="http://schemas.openxmlformats.org/drawingml/2006/lockedCanvas">
       <c:ext xmlns:c16r3="http://schemas.microsoft.com/office/drawing/2017/03/chart" uri="{56B9EC1D-385E-4148-901F-78D8002777C0}">
         <c16r3:dataDisplayOptions16>
           <c16r3:dispNaAsBlank val="1"/>
         </c16r3:dataDisplayOptions16>
       </c:ext>
     </c:extLst>
-    <c:showDLblsOverMax val="0"/>
   </c:chart>
   <c:spPr>
     <a:noFill/>
@@ -2965,7 +2965,7 @@
                 </a:outerShdw>
               </a:effectLst>
             </c:spPr>
-            <c:extLst xmlns:lc="http://schemas.openxmlformats.org/drawingml/2006/lockedCanvas" xmlns:comp="http://schemas.openxmlformats.org/drawingml/2006/compatibility" xmlns:we="http://schemas.microsoft.com/office/webextensions/webextension/2010/11" xmlns:wetp="http://schemas.microsoft.com/office/webextensions/taskpanes/2010/11" xmlns:w16cid="http://schemas.microsoft.com/office/word/2016/wordml/cid" xmlns:w16se="http://schemas.microsoft.com/office/word/2015/wordml/symex" xmlns:wps="http://schemas.microsoft.com/office/word/2010/wordprocessingShape" xmlns:b="http://schemas.openxmlformats.org/officeDocument/2006/bibliography" xmlns:odgm="http://opendope.org/SmartArt/DataHierarchy" xmlns:odi="http://opendope.org/components" xmlns:oda="http://opendope.org/answers" xmlns:odq="http://opendope.org/questions" xmlns:odc="http://opendope.org/conditions" xmlns:odx="http://opendope.org/xpaths" xmlns:cppr="http://schemas.microsoft.com/office/2006/coverPageProps" xmlns:pvml="urn:schemas-microsoft-com:office:powerpoint" xmlns:w10="urn:schemas-microsoft-com:office:word" xmlns:v="urn:schemas-microsoft-com:vml" xmlns:o="urn:schemas-microsoft-com:office:office" xmlns:xvml="urn:schemas-microsoft-com:office:excel" xmlns:dsp="http://schemas.microsoft.com/office/drawing/2008/diagram" xmlns:xdr="http://schemas.openxmlformats.org/drawingml/2006/spreadsheetDrawing" xmlns:pic="http://schemas.openxmlformats.org/drawingml/2006/picture" xmlns:dgm="http://schemas.openxmlformats.org/drawingml/2006/diagram" xmlns:c14="http://schemas.microsoft.com/office/drawing/2007/8/2/chart" xmlns:cdr="http://schemas.openxmlformats.org/drawingml/2006/chartDrawing" xmlns:wne="http://schemas.microsoft.com/office/word/2006/wordml" xmlns:sl="http://schemas.openxmlformats.org/schemaLibrary/2006/main" xmlns:mc="http://schemas.openxmlformats.org/markup-compatibility/2006" xmlns:wp14="http://schemas.microsoft.com/office/word/2010/wordprocessingDrawing" xmlns:wp="http://schemas.openxmlformats.org/drawingml/2006/wordprocessingDrawing" xmlns:m="http://schemas.openxmlformats.org/officeDocument/2006/math" xmlns:w14="http://schemas.microsoft.com/office/word/2010/wordml" xmlns:w15="http://schemas.microsoft.com/office/word/2012/wordml" xmlns:w="http://schemas.openxmlformats.org/wordprocessingml/2006/main">
+            <c:extLst xmlns:w="http://schemas.openxmlformats.org/wordprocessingml/2006/main" xmlns:w15="http://schemas.microsoft.com/office/word/2012/wordml" xmlns:w14="http://schemas.microsoft.com/office/word/2010/wordml" xmlns:m="http://schemas.openxmlformats.org/officeDocument/2006/math" xmlns:wp="http://schemas.openxmlformats.org/drawingml/2006/wordprocessingDrawing" xmlns:wp14="http://schemas.microsoft.com/office/word/2010/wordprocessingDrawing" xmlns:mc="http://schemas.openxmlformats.org/markup-compatibility/2006" xmlns:sl="http://schemas.openxmlformats.org/schemaLibrary/2006/main" xmlns:wne="http://schemas.microsoft.com/office/word/2006/wordml" xmlns:cdr="http://schemas.openxmlformats.org/drawingml/2006/chartDrawing" xmlns:c14="http://schemas.microsoft.com/office/drawing/2007/8/2/chart" xmlns:dgm="http://schemas.openxmlformats.org/drawingml/2006/diagram" xmlns:pic="http://schemas.openxmlformats.org/drawingml/2006/picture" xmlns:xdr="http://schemas.openxmlformats.org/drawingml/2006/spreadsheetDrawing" xmlns:dsp="http://schemas.microsoft.com/office/drawing/2008/diagram" xmlns:xvml="urn:schemas-microsoft-com:office:excel" xmlns:o="urn:schemas-microsoft-com:office:office" xmlns:v="urn:schemas-microsoft-com:vml" xmlns:w10="urn:schemas-microsoft-com:office:word" xmlns:pvml="urn:schemas-microsoft-com:office:powerpoint" xmlns:cppr="http://schemas.microsoft.com/office/2006/coverPageProps" xmlns:odx="http://opendope.org/xpaths" xmlns:odc="http://opendope.org/conditions" xmlns:odq="http://opendope.org/questions" xmlns:oda="http://opendope.org/answers" xmlns:odi="http://opendope.org/components" xmlns:odgm="http://opendope.org/SmartArt/DataHierarchy" xmlns:b="http://schemas.openxmlformats.org/officeDocument/2006/bibliography" xmlns:wps="http://schemas.microsoft.com/office/word/2010/wordprocessingShape" xmlns:w16se="http://schemas.microsoft.com/office/word/2015/wordml/symex" xmlns:w16cid="http://schemas.microsoft.com/office/word/2016/wordml/cid" xmlns:wetp="http://schemas.microsoft.com/office/webextensions/taskpanes/2010/11" xmlns:we="http://schemas.microsoft.com/office/webextensions/webextension/2010/11" xmlns:comp="http://schemas.openxmlformats.org/drawingml/2006/compatibility" xmlns:lc="http://schemas.openxmlformats.org/drawingml/2006/lockedCanvas">
               <c:ext xmlns:c16="http://schemas.microsoft.com/office/drawing/2014/chart" uri="{C3380CC4-5D6E-409C-BE32-E72D297353CC}">
                 <c16:uniqueId val="{00000001-6147-E74A-AA7B-5531F0E4EE0C}"/>
               </c:ext>
@@ -3060,7 +3060,7 @@
               </c:numCache>
             </c:numRef>
           </c:val>
-          <c:extLst xmlns:lc="http://schemas.openxmlformats.org/drawingml/2006/lockedCanvas" xmlns:comp="http://schemas.openxmlformats.org/drawingml/2006/compatibility" xmlns:we="http://schemas.microsoft.com/office/webextensions/webextension/2010/11" xmlns:wetp="http://schemas.microsoft.com/office/webextensions/taskpanes/2010/11" xmlns:w16cid="http://schemas.microsoft.com/office/word/2016/wordml/cid" xmlns:w16se="http://schemas.microsoft.com/office/word/2015/wordml/symex" xmlns:wps="http://schemas.microsoft.com/office/word/2010/wordprocessingShape" xmlns:b="http://schemas.openxmlformats.org/officeDocument/2006/bibliography" xmlns:odgm="http://opendope.org/SmartArt/DataHierarchy" xmlns:odi="http://opendope.org/components" xmlns:oda="http://opendope.org/answers" xmlns:odq="http://opendope.org/questions" xmlns:odc="http://opendope.org/conditions" xmlns:odx="http://opendope.org/xpaths" xmlns:cppr="http://schemas.microsoft.com/office/2006/coverPageProps" xmlns:pvml="urn:schemas-microsoft-com:office:powerpoint" xmlns:w10="urn:schemas-microsoft-com:office:word" xmlns:v="urn:schemas-microsoft-com:vml" xmlns:o="urn:schemas-microsoft-com:office:office" xmlns:xvml="urn:schemas-microsoft-com:office:excel" xmlns:dsp="http://schemas.microsoft.com/office/drawing/2008/diagram" xmlns:xdr="http://schemas.openxmlformats.org/drawingml/2006/spreadsheetDrawing" xmlns:pic="http://schemas.openxmlformats.org/drawingml/2006/picture" xmlns:dgm="http://schemas.openxmlformats.org/drawingml/2006/diagram" xmlns:c14="http://schemas.microsoft.com/office/drawing/2007/8/2/chart" xmlns:cdr="http://schemas.openxmlformats.org/drawingml/2006/chartDrawing" xmlns:wne="http://schemas.microsoft.com/office/word/2006/wordml" xmlns:sl="http://schemas.openxmlformats.org/schemaLibrary/2006/main" xmlns:mc="http://schemas.openxmlformats.org/markup-compatibility/2006" xmlns:wp14="http://schemas.microsoft.com/office/word/2010/wordprocessingDrawing" xmlns:wp="http://schemas.openxmlformats.org/drawingml/2006/wordprocessingDrawing" xmlns:m="http://schemas.openxmlformats.org/officeDocument/2006/math" xmlns:w14="http://schemas.microsoft.com/office/word/2010/wordml" xmlns:w15="http://schemas.microsoft.com/office/word/2012/wordml" xmlns:w="http://schemas.openxmlformats.org/wordprocessingml/2006/main">
+          <c:extLst xmlns:w="http://schemas.openxmlformats.org/wordprocessingml/2006/main" xmlns:w15="http://schemas.microsoft.com/office/word/2012/wordml" xmlns:w14="http://schemas.microsoft.com/office/word/2010/wordml" xmlns:m="http://schemas.openxmlformats.org/officeDocument/2006/math" xmlns:wp="http://schemas.openxmlformats.org/drawingml/2006/wordprocessingDrawing" xmlns:wp14="http://schemas.microsoft.com/office/word/2010/wordprocessingDrawing" xmlns:mc="http://schemas.openxmlformats.org/markup-compatibility/2006" xmlns:sl="http://schemas.openxmlformats.org/schemaLibrary/2006/main" xmlns:wne="http://schemas.microsoft.com/office/word/2006/wordml" xmlns:cdr="http://schemas.openxmlformats.org/drawingml/2006/chartDrawing" xmlns:c14="http://schemas.microsoft.com/office/drawing/2007/8/2/chart" xmlns:dgm="http://schemas.openxmlformats.org/drawingml/2006/diagram" xmlns:pic="http://schemas.openxmlformats.org/drawingml/2006/picture" xmlns:xdr="http://schemas.openxmlformats.org/drawingml/2006/spreadsheetDrawing" xmlns:dsp="http://schemas.microsoft.com/office/drawing/2008/diagram" xmlns:xvml="urn:schemas-microsoft-com:office:excel" xmlns:o="urn:schemas-microsoft-com:office:office" xmlns:v="urn:schemas-microsoft-com:vml" xmlns:w10="urn:schemas-microsoft-com:office:word" xmlns:pvml="urn:schemas-microsoft-com:office:powerpoint" xmlns:cppr="http://schemas.microsoft.com/office/2006/coverPageProps" xmlns:odx="http://opendope.org/xpaths" xmlns:odc="http://opendope.org/conditions" xmlns:odq="http://opendope.org/questions" xmlns:oda="http://opendope.org/answers" xmlns:odi="http://opendope.org/components" xmlns:odgm="http://opendope.org/SmartArt/DataHierarchy" xmlns:b="http://schemas.openxmlformats.org/officeDocument/2006/bibliography" xmlns:wps="http://schemas.microsoft.com/office/word/2010/wordprocessingShape" xmlns:w16se="http://schemas.microsoft.com/office/word/2015/wordml/symex" xmlns:w16cid="http://schemas.microsoft.com/office/word/2016/wordml/cid" xmlns:wetp="http://schemas.microsoft.com/office/webextensions/taskpanes/2010/11" xmlns:we="http://schemas.microsoft.com/office/webextensions/webextension/2010/11" xmlns:comp="http://schemas.openxmlformats.org/drawingml/2006/compatibility" xmlns:lc="http://schemas.openxmlformats.org/drawingml/2006/lockedCanvas">
             <c:ext xmlns:c16="http://schemas.microsoft.com/office/drawing/2014/chart" uri="{C3380CC4-5D6E-409C-BE32-E72D297353CC}">
               <c16:uniqueId val="{00000002-6147-E74A-AA7B-5531F0E4EE0C}"/>
             </c:ext>
@@ -3670,14 +3670,14 @@
     </c:plotArea>
     <c:plotVisOnly val="1"/>
     <c:dispBlanksAs val="gap"/>
-    <c:extLst xmlns:lc="http://schemas.openxmlformats.org/drawingml/2006/lockedCanvas" xmlns:comp="http://schemas.openxmlformats.org/drawingml/2006/compatibility" xmlns:we="http://schemas.microsoft.com/office/webextensions/webextension/2010/11" xmlns:wetp="http://schemas.microsoft.com/office/webextensions/taskpanes/2010/11" xmlns:w16cid="http://schemas.microsoft.com/office/word/2016/wordml/cid" xmlns:w16se="http://schemas.microsoft.com/office/word/2015/wordml/symex" xmlns:wps="http://schemas.microsoft.com/office/word/2010/wordprocessingShape" xmlns:b="http://schemas.openxmlformats.org/officeDocument/2006/bibliography" xmlns:odgm="http://opendope.org/SmartArt/DataHierarchy" xmlns:odi="http://opendope.org/components" xmlns:oda="http://opendope.org/answers" xmlns:odq="http://opendope.org/questions" xmlns:odc="http://opendope.org/conditions" xmlns:odx="http://opendope.org/xpaths" xmlns:cppr="http://schemas.microsoft.com/office/2006/coverPageProps" xmlns:pvml="urn:schemas-microsoft-com:office:powerpoint" xmlns:w10="urn:schemas-microsoft-com:office:word" xmlns:v="urn:schemas-microsoft-com:vml" xmlns:o="urn:schemas-microsoft-com:office:office" xmlns:xvml="urn:schemas-microsoft-com:office:excel" xmlns:dsp="http://schemas.microsoft.com/office/drawing/2008/diagram" xmlns:xdr="http://schemas.openxmlformats.org/drawingml/2006/spreadsheetDrawing" xmlns:pic="http://schemas.openxmlformats.org/drawingml/2006/picture" xmlns:dgm="http://schemas.openxmlformats.org/drawingml/2006/diagram" xmlns:c14="http://schemas.microsoft.com/office/drawing/2007/8/2/chart" xmlns:cdr="http://schemas.openxmlformats.org/drawingml/2006/chartDrawing" xmlns:wne="http://schemas.microsoft.com/office/word/2006/wordml" xmlns:sl="http://schemas.openxmlformats.org/schemaLibrary/2006/main" xmlns:mc="http://schemas.openxmlformats.org/markup-compatibility/2006" xmlns:wp14="http://schemas.microsoft.com/office/word/2010/wordprocessingDrawing" xmlns:wp="http://schemas.openxmlformats.org/drawingml/2006/wordprocessingDrawing" xmlns:m="http://schemas.openxmlformats.org/officeDocument/2006/math" xmlns:w14="http://schemas.microsoft.com/office/word/2010/wordml" xmlns:w15="http://schemas.microsoft.com/office/word/2012/wordml" xmlns:w="http://schemas.openxmlformats.org/wordprocessingml/2006/main">
+    <c:showDLblsOverMax val="0"/>
+    <c:extLst xmlns:w="http://schemas.openxmlformats.org/wordprocessingml/2006/main" xmlns:w15="http://schemas.microsoft.com/office/word/2012/wordml" xmlns:w14="http://schemas.microsoft.com/office/word/2010/wordml" xmlns:m="http://schemas.openxmlformats.org/officeDocument/2006/math" xmlns:wp="http://schemas.openxmlformats.org/drawingml/2006/wordprocessingDrawing" xmlns:wp14="http://schemas.microsoft.com/office/word/2010/wordprocessingDrawing" xmlns:mc="http://schemas.openxmlformats.org/markup-compatibility/2006" xmlns:sl="http://schemas.openxmlformats.org/schemaLibrary/2006/main" xmlns:wne="http://schemas.microsoft.com/office/word/2006/wordml" xmlns:cdr="http://schemas.openxmlformats.org/drawingml/2006/chartDrawing" xmlns:c14="http://schemas.microsoft.com/office/drawing/2007/8/2/chart" xmlns:dgm="http://schemas.openxmlformats.org/drawingml/2006/diagram" xmlns:pic="http://schemas.openxmlformats.org/drawingml/2006/picture" xmlns:xdr="http://schemas.openxmlformats.org/drawingml/2006/spreadsheetDrawing" xmlns:dsp="http://schemas.microsoft.com/office/drawing/2008/diagram" xmlns:xvml="urn:schemas-microsoft-com:office:excel" xmlns:o="urn:schemas-microsoft-com:office:office" xmlns:v="urn:schemas-microsoft-com:vml" xmlns:w10="urn:schemas-microsoft-com:office:word" xmlns:pvml="urn:schemas-microsoft-com:office:powerpoint" xmlns:cppr="http://schemas.microsoft.com/office/2006/coverPageProps" xmlns:odx="http://opendope.org/xpaths" xmlns:odc="http://opendope.org/conditions" xmlns:odq="http://opendope.org/questions" xmlns:oda="http://opendope.org/answers" xmlns:odi="http://opendope.org/components" xmlns:odgm="http://opendope.org/SmartArt/DataHierarchy" xmlns:b="http://schemas.openxmlformats.org/officeDocument/2006/bibliography" xmlns:wps="http://schemas.microsoft.com/office/word/2010/wordprocessingShape" xmlns:w16se="http://schemas.microsoft.com/office/word/2015/wordml/symex" xmlns:w16cid="http://schemas.microsoft.com/office/word/2016/wordml/cid" xmlns:wetp="http://schemas.microsoft.com/office/webextensions/taskpanes/2010/11" xmlns:we="http://schemas.microsoft.com/office/webextensions/webextension/2010/11" xmlns:comp="http://schemas.openxmlformats.org/drawingml/2006/compatibility" xmlns:lc="http://schemas.openxmlformats.org/drawingml/2006/lockedCanvas">
       <c:ext xmlns:c16r3="http://schemas.microsoft.com/office/drawing/2017/03/chart" uri="{56B9EC1D-385E-4148-901F-78D8002777C0}">
         <c16r3:dataDisplayOptions16>
           <c16r3:dispNaAsBlank val="1"/>
         </c16r3:dataDisplayOptions16>
       </c:ext>
     </c:extLst>
-    <c:showDLblsOverMax val="0"/>
   </c:chart>
   <c:spPr>
     <a:noFill/>
@@ -3773,7 +3773,7 @@
                 </a:outerShdw>
               </a:effectLst>
             </c:spPr>
-            <c:extLst xmlns:w="http://schemas.openxmlformats.org/wordprocessingml/2006/main" xmlns:w15="http://schemas.microsoft.com/office/word/2012/wordml" xmlns:w14="http://schemas.microsoft.com/office/word/2010/wordml" xmlns:m="http://schemas.openxmlformats.org/officeDocument/2006/math" xmlns:wp="http://schemas.openxmlformats.org/drawingml/2006/wordprocessingDrawing" xmlns:wp14="http://schemas.microsoft.com/office/word/2010/wordprocessingDrawing" xmlns:mc="http://schemas.openxmlformats.org/markup-compatibility/2006" xmlns:sl="http://schemas.openxmlformats.org/schemaLibrary/2006/main" xmlns:wne="http://schemas.microsoft.com/office/word/2006/wordml" xmlns:cdr="http://schemas.openxmlformats.org/drawingml/2006/chartDrawing" xmlns:c14="http://schemas.microsoft.com/office/drawing/2007/8/2/chart" xmlns:dgm="http://schemas.openxmlformats.org/drawingml/2006/diagram" xmlns:pic="http://schemas.openxmlformats.org/drawingml/2006/picture" xmlns:xdr="http://schemas.openxmlformats.org/drawingml/2006/spreadsheetDrawing" xmlns:dsp="http://schemas.microsoft.com/office/drawing/2008/diagram" xmlns:xvml="urn:schemas-microsoft-com:office:excel" xmlns:o="urn:schemas-microsoft-com:office:office" xmlns:v="urn:schemas-microsoft-com:vml" xmlns:w10="urn:schemas-microsoft-com:office:word" xmlns:pvml="urn:schemas-microsoft-com:office:powerpoint" xmlns:cppr="http://schemas.microsoft.com/office/2006/coverPageProps" xmlns:odx="http://opendope.org/xpaths" xmlns:odc="http://opendope.org/conditions" xmlns:odq="http://opendope.org/questions" xmlns:oda="http://opendope.org/answers" xmlns:odi="http://opendope.org/components" xmlns:odgm="http://opendope.org/SmartArt/DataHierarchy" xmlns:b="http://schemas.openxmlformats.org/officeDocument/2006/bibliography" xmlns:wps="http://schemas.microsoft.com/office/word/2010/wordprocessingShape" xmlns:w16se="http://schemas.microsoft.com/office/word/2015/wordml/symex" xmlns:w16cid="http://schemas.microsoft.com/office/word/2016/wordml/cid" xmlns:wetp="http://schemas.microsoft.com/office/webextensions/taskpanes/2010/11" xmlns:we="http://schemas.microsoft.com/office/webextensions/webextension/2010/11" xmlns:comp="http://schemas.openxmlformats.org/drawingml/2006/compatibility" xmlns:lc="http://schemas.openxmlformats.org/drawingml/2006/lockedCanvas">
+            <c:extLst xmlns:lc="http://schemas.openxmlformats.org/drawingml/2006/lockedCanvas" xmlns:comp="http://schemas.openxmlformats.org/drawingml/2006/compatibility" xmlns:we="http://schemas.microsoft.com/office/webextensions/webextension/2010/11" xmlns:wetp="http://schemas.microsoft.com/office/webextensions/taskpanes/2010/11" xmlns:w16cid="http://schemas.microsoft.com/office/word/2016/wordml/cid" xmlns:w16se="http://schemas.microsoft.com/office/word/2015/wordml/symex" xmlns:wps="http://schemas.microsoft.com/office/word/2010/wordprocessingShape" xmlns:b="http://schemas.openxmlformats.org/officeDocument/2006/bibliography" xmlns:odgm="http://opendope.org/SmartArt/DataHierarchy" xmlns:odi="http://opendope.org/components" xmlns:oda="http://opendope.org/answers" xmlns:odq="http://opendope.org/questions" xmlns:odc="http://opendope.org/conditions" xmlns:odx="http://opendope.org/xpaths" xmlns:cppr="http://schemas.microsoft.com/office/2006/coverPageProps" xmlns:pvml="urn:schemas-microsoft-com:office:powerpoint" xmlns:w10="urn:schemas-microsoft-com:office:word" xmlns:v="urn:schemas-microsoft-com:vml" xmlns:o="urn:schemas-microsoft-com:office:office" xmlns:xvml="urn:schemas-microsoft-com:office:excel" xmlns:dsp="http://schemas.microsoft.com/office/drawing/2008/diagram" xmlns:xdr="http://schemas.openxmlformats.org/drawingml/2006/spreadsheetDrawing" xmlns:pic="http://schemas.openxmlformats.org/drawingml/2006/picture" xmlns:dgm="http://schemas.openxmlformats.org/drawingml/2006/diagram" xmlns:c14="http://schemas.microsoft.com/office/drawing/2007/8/2/chart" xmlns:cdr="http://schemas.openxmlformats.org/drawingml/2006/chartDrawing" xmlns:wne="http://schemas.microsoft.com/office/word/2006/wordml" xmlns:sl="http://schemas.openxmlformats.org/schemaLibrary/2006/main" xmlns:mc="http://schemas.openxmlformats.org/markup-compatibility/2006" xmlns:wp14="http://schemas.microsoft.com/office/word/2010/wordprocessingDrawing" xmlns:wp="http://schemas.openxmlformats.org/drawingml/2006/wordprocessingDrawing" xmlns:m="http://schemas.openxmlformats.org/officeDocument/2006/math" xmlns:w14="http://schemas.microsoft.com/office/word/2010/wordml" xmlns:w15="http://schemas.microsoft.com/office/word/2012/wordml" xmlns:w="http://schemas.openxmlformats.org/wordprocessingml/2006/main">
               <c:ext xmlns:c16="http://schemas.microsoft.com/office/drawing/2014/chart" uri="{C3380CC4-5D6E-409C-BE32-E72D297353CC}">
                 <c16:uniqueId val="{00000001-6147-E74A-AA7B-5531F0E4EE0C}"/>
               </c:ext>
@@ -3868,7 +3868,7 @@
               </c:numCache>
             </c:numRef>
           </c:val>
-          <c:extLst xmlns:w="http://schemas.openxmlformats.org/wordprocessingml/2006/main" xmlns:w15="http://schemas.microsoft.com/office/word/2012/wordml" xmlns:w14="http://schemas.microsoft.com/office/word/2010/wordml" xmlns:m="http://schemas.openxmlformats.org/officeDocument/2006/math" xmlns:wp="http://schemas.openxmlformats.org/drawingml/2006/wordprocessingDrawing" xmlns:wp14="http://schemas.microsoft.com/office/word/2010/wordprocessingDrawing" xmlns:mc="http://schemas.openxmlformats.org/markup-compatibility/2006" xmlns:sl="http://schemas.openxmlformats.org/schemaLibrary/2006/main" xmlns:wne="http://schemas.microsoft.com/office/word/2006/wordml" xmlns:cdr="http://schemas.openxmlformats.org/drawingml/2006/chartDrawing" xmlns:c14="http://schemas.microsoft.com/office/drawing/2007/8/2/chart" xmlns:dgm="http://schemas.openxmlformats.org/drawingml/2006/diagram" xmlns:pic="http://schemas.openxmlformats.org/drawingml/2006/picture" xmlns:xdr="http://schemas.openxmlformats.org/drawingml/2006/spreadsheetDrawing" xmlns:dsp="http://schemas.microsoft.com/office/drawing/2008/diagram" xmlns:xvml="urn:schemas-microsoft-com:office:excel" xmlns:o="urn:schemas-microsoft-com:office:office" xmlns:v="urn:schemas-microsoft-com:vml" xmlns:w10="urn:schemas-microsoft-com:office:word" xmlns:pvml="urn:schemas-microsoft-com:office:powerpoint" xmlns:cppr="http://schemas.microsoft.com/office/2006/coverPageProps" xmlns:odx="http://opendope.org/xpaths" xmlns:odc="http://opendope.org/conditions" xmlns:odq="http://opendope.org/questions" xmlns:oda="http://opendope.org/answers" xmlns:odi="http://opendope.org/components" xmlns:odgm="http://opendope.org/SmartArt/DataHierarchy" xmlns:b="http://schemas.openxmlformats.org/officeDocument/2006/bibliography" xmlns:wps="http://schemas.microsoft.com/office/word/2010/wordprocessingShape" xmlns:w16se="http://schemas.microsoft.com/office/word/2015/wordml/symex" xmlns:w16cid="http://schemas.microsoft.com/office/word/2016/wordml/cid" xmlns:wetp="http://schemas.microsoft.com/office/webextensions/taskpanes/2010/11" xmlns:we="http://schemas.microsoft.com/office/webextensions/webextension/2010/11" xmlns:comp="http://schemas.openxmlformats.org/drawingml/2006/compatibility" xmlns:lc="http://schemas.openxmlformats.org/drawingml/2006/lockedCanvas">
+          <c:extLst xmlns:lc="http://schemas.openxmlformats.org/drawingml/2006/lockedCanvas" xmlns:comp="http://schemas.openxmlformats.org/drawingml/2006/compatibility" xmlns:we="http://schemas.microsoft.com/office/webextensions/webextension/2010/11" xmlns:wetp="http://schemas.microsoft.com/office/webextensions/taskpanes/2010/11" xmlns:w16cid="http://schemas.microsoft.com/office/word/2016/wordml/cid" xmlns:w16se="http://schemas.microsoft.com/office/word/2015/wordml/symex" xmlns:wps="http://schemas.microsoft.com/office/word/2010/wordprocessingShape" xmlns:b="http://schemas.openxmlformats.org/officeDocument/2006/bibliography" xmlns:odgm="http://opendope.org/SmartArt/DataHierarchy" xmlns:odi="http://opendope.org/components" xmlns:oda="http://opendope.org/answers" xmlns:odq="http://opendope.org/questions" xmlns:odc="http://opendope.org/conditions" xmlns:odx="http://opendope.org/xpaths" xmlns:cppr="http://schemas.microsoft.com/office/2006/coverPageProps" xmlns:pvml="urn:schemas-microsoft-com:office:powerpoint" xmlns:w10="urn:schemas-microsoft-com:office:word" xmlns:v="urn:schemas-microsoft-com:vml" xmlns:o="urn:schemas-microsoft-com:office:office" xmlns:xvml="urn:schemas-microsoft-com:office:excel" xmlns:dsp="http://schemas.microsoft.com/office/drawing/2008/diagram" xmlns:xdr="http://schemas.openxmlformats.org/drawingml/2006/spreadsheetDrawing" xmlns:pic="http://schemas.openxmlformats.org/drawingml/2006/picture" xmlns:dgm="http://schemas.openxmlformats.org/drawingml/2006/diagram" xmlns:c14="http://schemas.microsoft.com/office/drawing/2007/8/2/chart" xmlns:cdr="http://schemas.openxmlformats.org/drawingml/2006/chartDrawing" xmlns:wne="http://schemas.microsoft.com/office/word/2006/wordml" xmlns:sl="http://schemas.openxmlformats.org/schemaLibrary/2006/main" xmlns:mc="http://schemas.openxmlformats.org/markup-compatibility/2006" xmlns:wp14="http://schemas.microsoft.com/office/word/2010/wordprocessingDrawing" xmlns:wp="http://schemas.openxmlformats.org/drawingml/2006/wordprocessingDrawing" xmlns:m="http://schemas.openxmlformats.org/officeDocument/2006/math" xmlns:w14="http://schemas.microsoft.com/office/word/2010/wordml" xmlns:w15="http://schemas.microsoft.com/office/word/2012/wordml" xmlns:w="http://schemas.openxmlformats.org/wordprocessingml/2006/main">
             <c:ext xmlns:c16="http://schemas.microsoft.com/office/drawing/2014/chart" uri="{C3380CC4-5D6E-409C-BE32-E72D297353CC}">
               <c16:uniqueId val="{00000002-6147-E74A-AA7B-5531F0E4EE0C}"/>
             </c:ext>
@@ -4478,14 +4478,14 @@
     </c:plotArea>
     <c:plotVisOnly val="1"/>
     <c:dispBlanksAs val="gap"/>
-    <c:extLst xmlns:w="http://schemas.openxmlformats.org/wordprocessingml/2006/main" xmlns:w15="http://schemas.microsoft.com/office/word/2012/wordml" xmlns:w14="http://schemas.microsoft.com/office/word/2010/wordml" xmlns:m="http://schemas.openxmlformats.org/officeDocument/2006/math" xmlns:wp="http://schemas.openxmlformats.org/drawingml/2006/wordprocessingDrawing" xmlns:wp14="http://schemas.microsoft.com/office/word/2010/wordprocessingDrawing" xmlns:mc="http://schemas.openxmlformats.org/markup-compatibility/2006" xmlns:sl="http://schemas.openxmlformats.org/schemaLibrary/2006/main" xmlns:wne="http://schemas.microsoft.com/office/word/2006/wordml" xmlns:cdr="http://schemas.openxmlformats.org/drawingml/2006/chartDrawing" xmlns:c14="http://schemas.microsoft.com/office/drawing/2007/8/2/chart" xmlns:dgm="http://schemas.openxmlformats.org/drawingml/2006/diagram" xmlns:pic="http://schemas.openxmlformats.org/drawingml/2006/picture" xmlns:xdr="http://schemas.openxmlformats.org/drawingml/2006/spreadsheetDrawing" xmlns:dsp="http://schemas.microsoft.com/office/drawing/2008/diagram" xmlns:xvml="urn:schemas-microsoft-com:office:excel" xmlns:o="urn:schemas-microsoft-com:office:office" xmlns:v="urn:schemas-microsoft-com:vml" xmlns:w10="urn:schemas-microsoft-com:office:word" xmlns:pvml="urn:schemas-microsoft-com:office:powerpoint" xmlns:cppr="http://schemas.microsoft.com/office/2006/coverPageProps" xmlns:odx="http://opendope.org/xpaths" xmlns:odc="http://opendope.org/conditions" xmlns:odq="http://opendope.org/questions" xmlns:oda="http://opendope.org/answers" xmlns:odi="http://opendope.org/components" xmlns:odgm="http://opendope.org/SmartArt/DataHierarchy" xmlns:b="http://schemas.openxmlformats.org/officeDocument/2006/bibliography" xmlns:wps="http://schemas.microsoft.com/office/word/2010/wordprocessingShape" xmlns:w16se="http://schemas.microsoft.com/office/word/2015/wordml/symex" xmlns:w16cid="http://schemas.microsoft.com/office/word/2016/wordml/cid" xmlns:wetp="http://schemas.microsoft.com/office/webextensions/taskpanes/2010/11" xmlns:we="http://schemas.microsoft.com/office/webextensions/webextension/2010/11" xmlns:comp="http://schemas.openxmlformats.org/drawingml/2006/compatibility" xmlns:lc="http://schemas.openxmlformats.org/drawingml/2006/lockedCanvas">
+    <c:showDLblsOverMax val="0"/>
+    <c:extLst xmlns:lc="http://schemas.openxmlformats.org/drawingml/2006/lockedCanvas" xmlns:comp="http://schemas.openxmlformats.org/drawingml/2006/compatibility" xmlns:we="http://schemas.microsoft.com/office/webextensions/webextension/2010/11" xmlns:wetp="http://schemas.microsoft.com/office/webextensions/taskpanes/2010/11" xmlns:w16cid="http://schemas.microsoft.com/office/word/2016/wordml/cid" xmlns:w16se="http://schemas.microsoft.com/office/word/2015/wordml/symex" xmlns:wps="http://schemas.microsoft.com/office/word/2010/wordprocessingShape" xmlns:b="http://schemas.openxmlformats.org/officeDocument/2006/bibliography" xmlns:odgm="http://opendope.org/SmartArt/DataHierarchy" xmlns:odi="http://opendope.org/components" xmlns:oda="http://opendope.org/answers" xmlns:odq="http://opendope.org/questions" xmlns:odc="http://opendope.org/conditions" xmlns:odx="http://opendope.org/xpaths" xmlns:cppr="http://schemas.microsoft.com/office/2006/coverPageProps" xmlns:pvml="urn:schemas-microsoft-com:office:powerpoint" xmlns:w10="urn:schemas-microsoft-com:office:word" xmlns:v="urn:schemas-microsoft-com:vml" xmlns:o="urn:schemas-microsoft-com:office:office" xmlns:xvml="urn:schemas-microsoft-com:office:excel" xmlns:dsp="http://schemas.microsoft.com/office/drawing/2008/diagram" xmlns:xdr="http://schemas.openxmlformats.org/drawingml/2006/spreadsheetDrawing" xmlns:pic="http://schemas.openxmlformats.org/drawingml/2006/picture" xmlns:dgm="http://schemas.openxmlformats.org/drawingml/2006/diagram" xmlns:c14="http://schemas.microsoft.com/office/drawing/2007/8/2/chart" xmlns:cdr="http://schemas.openxmlformats.org/drawingml/2006/chartDrawing" xmlns:wne="http://schemas.microsoft.com/office/word/2006/wordml" xmlns:sl="http://schemas.openxmlformats.org/schemaLibrary/2006/main" xmlns:mc="http://schemas.openxmlformats.org/markup-compatibility/2006" xmlns:wp14="http://schemas.microsoft.com/office/word/2010/wordprocessingDrawing" xmlns:wp="http://schemas.openxmlformats.org/drawingml/2006/wordprocessingDrawing" xmlns:m="http://schemas.openxmlformats.org/officeDocument/2006/math" xmlns:w14="http://schemas.microsoft.com/office/word/2010/wordml" xmlns:w15="http://schemas.microsoft.com/office/word/2012/wordml" xmlns:w="http://schemas.openxmlformats.org/wordprocessingml/2006/main">
       <c:ext xmlns:c16r3="http://schemas.microsoft.com/office/drawing/2017/03/chart" uri="{56B9EC1D-385E-4148-901F-78D8002777C0}">
         <c16r3:dataDisplayOptions16>
           <c16r3:dispNaAsBlank val="1"/>
         </c16r3:dataDisplayOptions16>
       </c:ext>
     </c:extLst>
-    <c:showDLblsOverMax val="0"/>
   </c:chart>
   <c:spPr>
     <a:noFill/>
@@ -4581,7 +4581,7 @@
                 </a:outerShdw>
               </a:effectLst>
             </c:spPr>
-            <c:extLst xmlns:w="http://schemas.openxmlformats.org/wordprocessingml/2006/main" xmlns:w15="http://schemas.microsoft.com/office/word/2012/wordml" xmlns:w14="http://schemas.microsoft.com/office/word/2010/wordml" xmlns:m="http://schemas.openxmlformats.org/officeDocument/2006/math" xmlns:wp="http://schemas.openxmlformats.org/drawingml/2006/wordprocessingDrawing" xmlns:wp14="http://schemas.microsoft.com/office/word/2010/wordprocessingDrawing" xmlns:mc="http://schemas.openxmlformats.org/markup-compatibility/2006" xmlns:sl="http://schemas.openxmlformats.org/schemaLibrary/2006/main" xmlns:wne="http://schemas.microsoft.com/office/word/2006/wordml" xmlns:cdr="http://schemas.openxmlformats.org/drawingml/2006/chartDrawing" xmlns:c14="http://schemas.microsoft.com/office/drawing/2007/8/2/chart" xmlns:dgm="http://schemas.openxmlformats.org/drawingml/2006/diagram" xmlns:pic="http://schemas.openxmlformats.org/drawingml/2006/picture" xmlns:xdr="http://schemas.openxmlformats.org/drawingml/2006/spreadsheetDrawing" xmlns:dsp="http://schemas.microsoft.com/office/drawing/2008/diagram" xmlns:xvml="urn:schemas-microsoft-com:office:excel" xmlns:o="urn:schemas-microsoft-com:office:office" xmlns:v="urn:schemas-microsoft-com:vml" xmlns:w10="urn:schemas-microsoft-com:office:word" xmlns:pvml="urn:schemas-microsoft-com:office:powerpoint" xmlns:cppr="http://schemas.microsoft.com/office/2006/coverPageProps" xmlns:odx="http://opendope.org/xpaths" xmlns:odc="http://opendope.org/conditions" xmlns:odq="http://opendope.org/questions" xmlns:oda="http://opendope.org/answers" xmlns:odi="http://opendope.org/components" xmlns:odgm="http://opendope.org/SmartArt/DataHierarchy" xmlns:b="http://schemas.openxmlformats.org/officeDocument/2006/bibliography" xmlns:wps="http://schemas.microsoft.com/office/word/2010/wordprocessingShape" xmlns:w16se="http://schemas.microsoft.com/office/word/2015/wordml/symex" xmlns:w16cid="http://schemas.microsoft.com/office/word/2016/wordml/cid" xmlns:wetp="http://schemas.microsoft.com/office/webextensions/taskpanes/2010/11" xmlns:we="http://schemas.microsoft.com/office/webextensions/webextension/2010/11" xmlns:comp="http://schemas.openxmlformats.org/drawingml/2006/compatibility" xmlns:lc="http://schemas.openxmlformats.org/drawingml/2006/lockedCanvas">
+            <c:extLst xmlns:lc="http://schemas.openxmlformats.org/drawingml/2006/lockedCanvas" xmlns:comp="http://schemas.openxmlformats.org/drawingml/2006/compatibility" xmlns:we="http://schemas.microsoft.com/office/webextensions/webextension/2010/11" xmlns:wetp="http://schemas.microsoft.com/office/webextensions/taskpanes/2010/11" xmlns:w16cid="http://schemas.microsoft.com/office/word/2016/wordml/cid" xmlns:w16se="http://schemas.microsoft.com/office/word/2015/wordml/symex" xmlns:wps="http://schemas.microsoft.com/office/word/2010/wordprocessingShape" xmlns:b="http://schemas.openxmlformats.org/officeDocument/2006/bibliography" xmlns:odgm="http://opendope.org/SmartArt/DataHierarchy" xmlns:odi="http://opendope.org/components" xmlns:oda="http://opendope.org/answers" xmlns:odq="http://opendope.org/questions" xmlns:odc="http://opendope.org/conditions" xmlns:odx="http://opendope.org/xpaths" xmlns:cppr="http://schemas.microsoft.com/office/2006/coverPageProps" xmlns:pvml="urn:schemas-microsoft-com:office:powerpoint" xmlns:w10="urn:schemas-microsoft-com:office:word" xmlns:v="urn:schemas-microsoft-com:vml" xmlns:o="urn:schemas-microsoft-com:office:office" xmlns:xvml="urn:schemas-microsoft-com:office:excel" xmlns:dsp="http://schemas.microsoft.com/office/drawing/2008/diagram" xmlns:xdr="http://schemas.openxmlformats.org/drawingml/2006/spreadsheetDrawing" xmlns:pic="http://schemas.openxmlformats.org/drawingml/2006/picture" xmlns:dgm="http://schemas.openxmlformats.org/drawingml/2006/diagram" xmlns:c14="http://schemas.microsoft.com/office/drawing/2007/8/2/chart" xmlns:cdr="http://schemas.openxmlformats.org/drawingml/2006/chartDrawing" xmlns:wne="http://schemas.microsoft.com/office/word/2006/wordml" xmlns:sl="http://schemas.openxmlformats.org/schemaLibrary/2006/main" xmlns:mc="http://schemas.openxmlformats.org/markup-compatibility/2006" xmlns:wp14="http://schemas.microsoft.com/office/word/2010/wordprocessingDrawing" xmlns:wp="http://schemas.openxmlformats.org/drawingml/2006/wordprocessingDrawing" xmlns:m="http://schemas.openxmlformats.org/officeDocument/2006/math" xmlns:w14="http://schemas.microsoft.com/office/word/2010/wordml" xmlns:w15="http://schemas.microsoft.com/office/word/2012/wordml" xmlns:w="http://schemas.openxmlformats.org/wordprocessingml/2006/main">
               <c:ext xmlns:c16="http://schemas.microsoft.com/office/drawing/2014/chart" uri="{C3380CC4-5D6E-409C-BE32-E72D297353CC}">
                 <c16:uniqueId val="{00000001-6147-E74A-AA7B-5531F0E4EE0C}"/>
               </c:ext>
@@ -4676,7 +4676,7 @@
               </c:numCache>
             </c:numRef>
           </c:val>
-          <c:extLst xmlns:w="http://schemas.openxmlformats.org/wordprocessingml/2006/main" xmlns:w15="http://schemas.microsoft.com/office/word/2012/wordml" xmlns:w14="http://schemas.microsoft.com/office/word/2010/wordml" xmlns:m="http://schemas.openxmlformats.org/officeDocument/2006/math" xmlns:wp="http://schemas.openxmlformats.org/drawingml/2006/wordprocessingDrawing" xmlns:wp14="http://schemas.microsoft.com/office/word/2010/wordprocessingDrawing" xmlns:mc="http://schemas.openxmlformats.org/markup-compatibility/2006" xmlns:sl="http://schemas.openxmlformats.org/schemaLibrary/2006/main" xmlns:wne="http://schemas.microsoft.com/office/word/2006/wordml" xmlns:cdr="http://schemas.openxmlformats.org/drawingml/2006/chartDrawing" xmlns:c14="http://schemas.microsoft.com/office/drawing/2007/8/2/chart" xmlns:dgm="http://schemas.openxmlformats.org/drawingml/2006/diagram" xmlns:pic="http://schemas.openxmlformats.org/drawingml/2006/picture" xmlns:xdr="http://schemas.openxmlformats.org/drawingml/2006/spreadsheetDrawing" xmlns:dsp="http://schemas.microsoft.com/office/drawing/2008/diagram" xmlns:xvml="urn:schemas-microsoft-com:office:excel" xmlns:o="urn:schemas-microsoft-com:office:office" xmlns:v="urn:schemas-microsoft-com:vml" xmlns:w10="urn:schemas-microsoft-com:office:word" xmlns:pvml="urn:schemas-microsoft-com:office:powerpoint" xmlns:cppr="http://schemas.microsoft.com/office/2006/coverPageProps" xmlns:odx="http://opendope.org/xpaths" xmlns:odc="http://opendope.org/conditions" xmlns:odq="http://opendope.org/questions" xmlns:oda="http://opendope.org/answers" xmlns:odi="http://opendope.org/components" xmlns:odgm="http://opendope.org/SmartArt/DataHierarchy" xmlns:b="http://schemas.openxmlformats.org/officeDocument/2006/bibliography" xmlns:wps="http://schemas.microsoft.com/office/word/2010/wordprocessingShape" xmlns:w16se="http://schemas.microsoft.com/office/word/2015/wordml/symex" xmlns:w16cid="http://schemas.microsoft.com/office/word/2016/wordml/cid" xmlns:wetp="http://schemas.microsoft.com/office/webextensions/taskpanes/2010/11" xmlns:we="http://schemas.microsoft.com/office/webextensions/webextension/2010/11" xmlns:comp="http://schemas.openxmlformats.org/drawingml/2006/compatibility" xmlns:lc="http://schemas.openxmlformats.org/drawingml/2006/lockedCanvas">
+          <c:extLst xmlns:lc="http://schemas.openxmlformats.org/drawingml/2006/lockedCanvas" xmlns:comp="http://schemas.openxmlformats.org/drawingml/2006/compatibility" xmlns:we="http://schemas.microsoft.com/office/webextensions/webextension/2010/11" xmlns:wetp="http://schemas.microsoft.com/office/webextensions/taskpanes/2010/11" xmlns:w16cid="http://schemas.microsoft.com/office/word/2016/wordml/cid" xmlns:w16se="http://schemas.microsoft.com/office/word/2015/wordml/symex" xmlns:wps="http://schemas.microsoft.com/office/word/2010/wordprocessingShape" xmlns:b="http://schemas.openxmlformats.org/officeDocument/2006/bibliography" xmlns:odgm="http://opendope.org/SmartArt/DataHierarchy" xmlns:odi="http://opendope.org/components" xmlns:oda="http://opendope.org/answers" xmlns:odq="http://opendope.org/questions" xmlns:odc="http://opendope.org/conditions" xmlns:odx="http://opendope.org/xpaths" xmlns:cppr="http://schemas.microsoft.com/office/2006/coverPageProps" xmlns:pvml="urn:schemas-microsoft-com:office:powerpoint" xmlns:w10="urn:schemas-microsoft-com:office:word" xmlns:v="urn:schemas-microsoft-com:vml" xmlns:o="urn:schemas-microsoft-com:office:office" xmlns:xvml="urn:schemas-microsoft-com:office:excel" xmlns:dsp="http://schemas.microsoft.com/office/drawing/2008/diagram" xmlns:xdr="http://schemas.openxmlformats.org/drawingml/2006/spreadsheetDrawing" xmlns:pic="http://schemas.openxmlformats.org/drawingml/2006/picture" xmlns:dgm="http://schemas.openxmlformats.org/drawingml/2006/diagram" xmlns:c14="http://schemas.microsoft.com/office/drawing/2007/8/2/chart" xmlns:cdr="http://schemas.openxmlformats.org/drawingml/2006/chartDrawing" xmlns:wne="http://schemas.microsoft.com/office/word/2006/wordml" xmlns:sl="http://schemas.openxmlformats.org/schemaLibrary/2006/main" xmlns:mc="http://schemas.openxmlformats.org/markup-compatibility/2006" xmlns:wp14="http://schemas.microsoft.com/office/word/2010/wordprocessingDrawing" xmlns:wp="http://schemas.openxmlformats.org/drawingml/2006/wordprocessingDrawing" xmlns:m="http://schemas.openxmlformats.org/officeDocument/2006/math" xmlns:w14="http://schemas.microsoft.com/office/word/2010/wordml" xmlns:w15="http://schemas.microsoft.com/office/word/2012/wordml" xmlns:w="http://schemas.openxmlformats.org/wordprocessingml/2006/main">
             <c:ext xmlns:c16="http://schemas.microsoft.com/office/drawing/2014/chart" uri="{C3380CC4-5D6E-409C-BE32-E72D297353CC}">
               <c16:uniqueId val="{00000002-6147-E74A-AA7B-5531F0E4EE0C}"/>
             </c:ext>
@@ -5286,14 +5286,14 @@
     </c:plotArea>
     <c:plotVisOnly val="1"/>
     <c:dispBlanksAs val="gap"/>
-    <c:extLst xmlns:w="http://schemas.openxmlformats.org/wordprocessingml/2006/main" xmlns:w15="http://schemas.microsoft.com/office/word/2012/wordml" xmlns:w14="http://schemas.microsoft.com/office/word/2010/wordml" xmlns:m="http://schemas.openxmlformats.org/officeDocument/2006/math" xmlns:wp="http://schemas.openxmlformats.org/drawingml/2006/wordprocessingDrawing" xmlns:wp14="http://schemas.microsoft.com/office/word/2010/wordprocessingDrawing" xmlns:mc="http://schemas.openxmlformats.org/markup-compatibility/2006" xmlns:sl="http://schemas.openxmlformats.org/schemaLibrary/2006/main" xmlns:wne="http://schemas.microsoft.com/office/word/2006/wordml" xmlns:cdr="http://schemas.openxmlformats.org/drawingml/2006/chartDrawing" xmlns:c14="http://schemas.microsoft.com/office/drawing/2007/8/2/chart" xmlns:dgm="http://schemas.openxmlformats.org/drawingml/2006/diagram" xmlns:pic="http://schemas.openxmlformats.org/drawingml/2006/picture" xmlns:xdr="http://schemas.openxmlformats.org/drawingml/2006/spreadsheetDrawing" xmlns:dsp="http://schemas.microsoft.com/office/drawing/2008/diagram" xmlns:xvml="urn:schemas-microsoft-com:office:excel" xmlns:o="urn:schemas-microsoft-com:office:office" xmlns:v="urn:schemas-microsoft-com:vml" xmlns:w10="urn:schemas-microsoft-com:office:word" xmlns:pvml="urn:schemas-microsoft-com:office:powerpoint" xmlns:cppr="http://schemas.microsoft.com/office/2006/coverPageProps" xmlns:odx="http://opendope.org/xpaths" xmlns:odc="http://opendope.org/conditions" xmlns:odq="http://opendope.org/questions" xmlns:oda="http://opendope.org/answers" xmlns:odi="http://opendope.org/components" xmlns:odgm="http://opendope.org/SmartArt/DataHierarchy" xmlns:b="http://schemas.openxmlformats.org/officeDocument/2006/bibliography" xmlns:wps="http://schemas.microsoft.com/office/word/2010/wordprocessingShape" xmlns:w16se="http://schemas.microsoft.com/office/word/2015/wordml/symex" xmlns:w16cid="http://schemas.microsoft.com/office/word/2016/wordml/cid" xmlns:wetp="http://schemas.microsoft.com/office/webextensions/taskpanes/2010/11" xmlns:we="http://schemas.microsoft.com/office/webextensions/webextension/2010/11" xmlns:comp="http://schemas.openxmlformats.org/drawingml/2006/compatibility" xmlns:lc="http://schemas.openxmlformats.org/drawingml/2006/lockedCanvas">
+    <c:showDLblsOverMax val="0"/>
+    <c:extLst xmlns:lc="http://schemas.openxmlformats.org/drawingml/2006/lockedCanvas" xmlns:comp="http://schemas.openxmlformats.org/drawingml/2006/compatibility" xmlns:we="http://schemas.microsoft.com/office/webextensions/webextension/2010/11" xmlns:wetp="http://schemas.microsoft.com/office/webextensions/taskpanes/2010/11" xmlns:w16cid="http://schemas.microsoft.com/office/word/2016/wordml/cid" xmlns:w16se="http://schemas.microsoft.com/office/word/2015/wordml/symex" xmlns:wps="http://schemas.microsoft.com/office/word/2010/wordprocessingShape" xmlns:b="http://schemas.openxmlformats.org/officeDocument/2006/bibliography" xmlns:odgm="http://opendope.org/SmartArt/DataHierarchy" xmlns:odi="http://opendope.org/components" xmlns:oda="http://opendope.org/answers" xmlns:odq="http://opendope.org/questions" xmlns:odc="http://opendope.org/conditions" xmlns:odx="http://opendope.org/xpaths" xmlns:cppr="http://schemas.microsoft.com/office/2006/coverPageProps" xmlns:pvml="urn:schemas-microsoft-com:office:powerpoint" xmlns:w10="urn:schemas-microsoft-com:office:word" xmlns:v="urn:schemas-microsoft-com:vml" xmlns:o="urn:schemas-microsoft-com:office:office" xmlns:xvml="urn:schemas-microsoft-com:office:excel" xmlns:dsp="http://schemas.microsoft.com/office/drawing/2008/diagram" xmlns:xdr="http://schemas.openxmlformats.org/drawingml/2006/spreadsheetDrawing" xmlns:pic="http://schemas.openxmlformats.org/drawingml/2006/picture" xmlns:dgm="http://schemas.openxmlformats.org/drawingml/2006/diagram" xmlns:c14="http://schemas.microsoft.com/office/drawing/2007/8/2/chart" xmlns:cdr="http://schemas.openxmlformats.org/drawingml/2006/chartDrawing" xmlns:wne="http://schemas.microsoft.com/office/word/2006/wordml" xmlns:sl="http://schemas.openxmlformats.org/schemaLibrary/2006/main" xmlns:mc="http://schemas.openxmlformats.org/markup-compatibility/2006" xmlns:wp14="http://schemas.microsoft.com/office/word/2010/wordprocessingDrawing" xmlns:wp="http://schemas.openxmlformats.org/drawingml/2006/wordprocessingDrawing" xmlns:m="http://schemas.openxmlformats.org/officeDocument/2006/math" xmlns:w14="http://schemas.microsoft.com/office/word/2010/wordml" xmlns:w15="http://schemas.microsoft.com/office/word/2012/wordml" xmlns:w="http://schemas.openxmlformats.org/wordprocessingml/2006/main">
       <c:ext xmlns:c16r3="http://schemas.microsoft.com/office/drawing/2017/03/chart" uri="{56B9EC1D-385E-4148-901F-78D8002777C0}">
         <c16r3:dataDisplayOptions16>
           <c16r3:dispNaAsBlank val="1"/>
         </c16r3:dataDisplayOptions16>
       </c:ext>
     </c:extLst>
-    <c:showDLblsOverMax val="0"/>
   </c:chart>
   <c:spPr>
     <a:noFill/>
@@ -5389,7 +5389,7 @@
                 </a:outerShdw>
               </a:effectLst>
             </c:spPr>
-            <c:extLst xmlns:w="http://schemas.openxmlformats.org/wordprocessingml/2006/main" xmlns:w15="http://schemas.microsoft.com/office/word/2012/wordml" xmlns:w14="http://schemas.microsoft.com/office/word/2010/wordml" xmlns:m="http://schemas.openxmlformats.org/officeDocument/2006/math" xmlns:wp="http://schemas.openxmlformats.org/drawingml/2006/wordprocessingDrawing" xmlns:wp14="http://schemas.microsoft.com/office/word/2010/wordprocessingDrawing" xmlns:mc="http://schemas.openxmlformats.org/markup-compatibility/2006" xmlns:sl="http://schemas.openxmlformats.org/schemaLibrary/2006/main" xmlns:wne="http://schemas.microsoft.com/office/word/2006/wordml" xmlns:cdr="http://schemas.openxmlformats.org/drawingml/2006/chartDrawing" xmlns:c14="http://schemas.microsoft.com/office/drawing/2007/8/2/chart" xmlns:dgm="http://schemas.openxmlformats.org/drawingml/2006/diagram" xmlns:pic="http://schemas.openxmlformats.org/drawingml/2006/picture" xmlns:xdr="http://schemas.openxmlformats.org/drawingml/2006/spreadsheetDrawing" xmlns:dsp="http://schemas.microsoft.com/office/drawing/2008/diagram" xmlns:xvml="urn:schemas-microsoft-com:office:excel" xmlns:o="urn:schemas-microsoft-com:office:office" xmlns:v="urn:schemas-microsoft-com:vml" xmlns:w10="urn:schemas-microsoft-com:office:word" xmlns:pvml="urn:schemas-microsoft-com:office:powerpoint" xmlns:cppr="http://schemas.microsoft.com/office/2006/coverPageProps" xmlns:odx="http://opendope.org/xpaths" xmlns:odc="http://opendope.org/conditions" xmlns:odq="http://opendope.org/questions" xmlns:oda="http://opendope.org/answers" xmlns:odi="http://opendope.org/components" xmlns:odgm="http://opendope.org/SmartArt/DataHierarchy" xmlns:b="http://schemas.openxmlformats.org/officeDocument/2006/bibliography" xmlns:wps="http://schemas.microsoft.com/office/word/2010/wordprocessingShape" xmlns:w16se="http://schemas.microsoft.com/office/word/2015/wordml/symex" xmlns:w16cid="http://schemas.microsoft.com/office/word/2016/wordml/cid" xmlns:wetp="http://schemas.microsoft.com/office/webextensions/taskpanes/2010/11" xmlns:we="http://schemas.microsoft.com/office/webextensions/webextension/2010/11" xmlns:comp="http://schemas.openxmlformats.org/drawingml/2006/compatibility" xmlns:lc="http://schemas.openxmlformats.org/drawingml/2006/lockedCanvas">
+            <c:extLst xmlns:lc="http://schemas.openxmlformats.org/drawingml/2006/lockedCanvas" xmlns:comp="http://schemas.openxmlformats.org/drawingml/2006/compatibility" xmlns:we="http://schemas.microsoft.com/office/webextensions/webextension/2010/11" xmlns:wetp="http://schemas.microsoft.com/office/webextensions/taskpanes/2010/11" xmlns:w16cid="http://schemas.microsoft.com/office/word/2016/wordml/cid" xmlns:w16se="http://schemas.microsoft.com/office/word/2015/wordml/symex" xmlns:wps="http://schemas.microsoft.com/office/word/2010/wordprocessingShape" xmlns:b="http://schemas.openxmlformats.org/officeDocument/2006/bibliography" xmlns:odgm="http://opendope.org/SmartArt/DataHierarchy" xmlns:odi="http://opendope.org/components" xmlns:oda="http://opendope.org/answers" xmlns:odq="http://opendope.org/questions" xmlns:odc="http://opendope.org/conditions" xmlns:odx="http://opendope.org/xpaths" xmlns:cppr="http://schemas.microsoft.com/office/2006/coverPageProps" xmlns:pvml="urn:schemas-microsoft-com:office:powerpoint" xmlns:w10="urn:schemas-microsoft-com:office:word" xmlns:v="urn:schemas-microsoft-com:vml" xmlns:o="urn:schemas-microsoft-com:office:office" xmlns:xvml="urn:schemas-microsoft-com:office:excel" xmlns:dsp="http://schemas.microsoft.com/office/drawing/2008/diagram" xmlns:xdr="http://schemas.openxmlformats.org/drawingml/2006/spreadsheetDrawing" xmlns:pic="http://schemas.openxmlformats.org/drawingml/2006/picture" xmlns:dgm="http://schemas.openxmlformats.org/drawingml/2006/diagram" xmlns:c14="http://schemas.microsoft.com/office/drawing/2007/8/2/chart" xmlns:cdr="http://schemas.openxmlformats.org/drawingml/2006/chartDrawing" xmlns:wne="http://schemas.microsoft.com/office/word/2006/wordml" xmlns:sl="http://schemas.openxmlformats.org/schemaLibrary/2006/main" xmlns:mc="http://schemas.openxmlformats.org/markup-compatibility/2006" xmlns:wp14="http://schemas.microsoft.com/office/word/2010/wordprocessingDrawing" xmlns:wp="http://schemas.openxmlformats.org/drawingml/2006/wordprocessingDrawing" xmlns:m="http://schemas.openxmlformats.org/officeDocument/2006/math" xmlns:w14="http://schemas.microsoft.com/office/word/2010/wordml" xmlns:w15="http://schemas.microsoft.com/office/word/2012/wordml" xmlns:w="http://schemas.openxmlformats.org/wordprocessingml/2006/main">
               <c:ext xmlns:c16="http://schemas.microsoft.com/office/drawing/2014/chart" uri="{C3380CC4-5D6E-409C-BE32-E72D297353CC}">
                 <c16:uniqueId val="{00000001-6147-E74A-AA7B-5531F0E4EE0C}"/>
               </c:ext>
@@ -5484,7 +5484,7 @@
               </c:numCache>
             </c:numRef>
           </c:val>
-          <c:extLst xmlns:w="http://schemas.openxmlformats.org/wordprocessingml/2006/main" xmlns:w15="http://schemas.microsoft.com/office/word/2012/wordml" xmlns:w14="http://schemas.microsoft.com/office/word/2010/wordml" xmlns:m="http://schemas.openxmlformats.org/officeDocument/2006/math" xmlns:wp="http://schemas.openxmlformats.org/drawingml/2006/wordprocessingDrawing" xmlns:wp14="http://schemas.microsoft.com/office/word/2010/wordprocessingDrawing" xmlns:mc="http://schemas.openxmlformats.org/markup-compatibility/2006" xmlns:sl="http://schemas.openxmlformats.org/schemaLibrary/2006/main" xmlns:wne="http://schemas.microsoft.com/office/word/2006/wordml" xmlns:cdr="http://schemas.openxmlformats.org/drawingml/2006/chartDrawing" xmlns:c14="http://schemas.microsoft.com/office/drawing/2007/8/2/chart" xmlns:dgm="http://schemas.openxmlformats.org/drawingml/2006/diagram" xmlns:pic="http://schemas.openxmlformats.org/drawingml/2006/picture" xmlns:xdr="http://schemas.openxmlformats.org/drawingml/2006/spreadsheetDrawing" xmlns:dsp="http://schemas.microsoft.com/office/drawing/2008/diagram" xmlns:xvml="urn:schemas-microsoft-com:office:excel" xmlns:o="urn:schemas-microsoft-com:office:office" xmlns:v="urn:schemas-microsoft-com:vml" xmlns:w10="urn:schemas-microsoft-com:office:word" xmlns:pvml="urn:schemas-microsoft-com:office:powerpoint" xmlns:cppr="http://schemas.microsoft.com/office/2006/coverPageProps" xmlns:odx="http://opendope.org/xpaths" xmlns:odc="http://opendope.org/conditions" xmlns:odq="http://opendope.org/questions" xmlns:oda="http://opendope.org/answers" xmlns:odi="http://opendope.org/components" xmlns:odgm="http://opendope.org/SmartArt/DataHierarchy" xmlns:b="http://schemas.openxmlformats.org/officeDocument/2006/bibliography" xmlns:wps="http://schemas.microsoft.com/office/word/2010/wordprocessingShape" xmlns:w16se="http://schemas.microsoft.com/office/word/2015/wordml/symex" xmlns:w16cid="http://schemas.microsoft.com/office/word/2016/wordml/cid" xmlns:wetp="http://schemas.microsoft.com/office/webextensions/taskpanes/2010/11" xmlns:we="http://schemas.microsoft.com/office/webextensions/webextension/2010/11" xmlns:comp="http://schemas.openxmlformats.org/drawingml/2006/compatibility" xmlns:lc="http://schemas.openxmlformats.org/drawingml/2006/lockedCanvas">
+          <c:extLst xmlns:lc="http://schemas.openxmlformats.org/drawingml/2006/lockedCanvas" xmlns:comp="http://schemas.openxmlformats.org/drawingml/2006/compatibility" xmlns:we="http://schemas.microsoft.com/office/webextensions/webextension/2010/11" xmlns:wetp="http://schemas.microsoft.com/office/webextensions/taskpanes/2010/11" xmlns:w16cid="http://schemas.microsoft.com/office/word/2016/wordml/cid" xmlns:w16se="http://schemas.microsoft.com/office/word/2015/wordml/symex" xmlns:wps="http://schemas.microsoft.com/office/word/2010/wordprocessingShape" xmlns:b="http://schemas.openxmlformats.org/officeDocument/2006/bibliography" xmlns:odgm="http://opendope.org/SmartArt/DataHierarchy" xmlns:odi="http://opendope.org/components" xmlns:oda="http://opendope.org/answers" xmlns:odq="http://opendope.org/questions" xmlns:odc="http://opendope.org/conditions" xmlns:odx="http://opendope.org/xpaths" xmlns:cppr="http://schemas.microsoft.com/office/2006/coverPageProps" xmlns:pvml="urn:schemas-microsoft-com:office:powerpoint" xmlns:w10="urn:schemas-microsoft-com:office:word" xmlns:v="urn:schemas-microsoft-com:vml" xmlns:o="urn:schemas-microsoft-com:office:office" xmlns:xvml="urn:schemas-microsoft-com:office:excel" xmlns:dsp="http://schemas.microsoft.com/office/drawing/2008/diagram" xmlns:xdr="http://schemas.openxmlformats.org/drawingml/2006/spreadsheetDrawing" xmlns:pic="http://schemas.openxmlformats.org/drawingml/2006/picture" xmlns:dgm="http://schemas.openxmlformats.org/drawingml/2006/diagram" xmlns:c14="http://schemas.microsoft.com/office/drawing/2007/8/2/chart" xmlns:cdr="http://schemas.openxmlformats.org/drawingml/2006/chartDrawing" xmlns:wne="http://schemas.microsoft.com/office/word/2006/wordml" xmlns:sl="http://schemas.openxmlformats.org/schemaLibrary/2006/main" xmlns:mc="http://schemas.openxmlformats.org/markup-compatibility/2006" xmlns:wp14="http://schemas.microsoft.com/office/word/2010/wordprocessingDrawing" xmlns:wp="http://schemas.openxmlformats.org/drawingml/2006/wordprocessingDrawing" xmlns:m="http://schemas.openxmlformats.org/officeDocument/2006/math" xmlns:w14="http://schemas.microsoft.com/office/word/2010/wordml" xmlns:w15="http://schemas.microsoft.com/office/word/2012/wordml" xmlns:w="http://schemas.openxmlformats.org/wordprocessingml/2006/main">
             <c:ext xmlns:c16="http://schemas.microsoft.com/office/drawing/2014/chart" uri="{C3380CC4-5D6E-409C-BE32-E72D297353CC}">
               <c16:uniqueId val="{00000002-6147-E74A-AA7B-5531F0E4EE0C}"/>
             </c:ext>
@@ -6094,14 +6094,14 @@
     </c:plotArea>
     <c:plotVisOnly val="1"/>
     <c:dispBlanksAs val="gap"/>
-    <c:extLst xmlns:w="http://schemas.openxmlformats.org/wordprocessingml/2006/main" xmlns:w15="http://schemas.microsoft.com/office/word/2012/wordml" xmlns:w14="http://schemas.microsoft.com/office/word/2010/wordml" xmlns:m="http://schemas.openxmlformats.org/officeDocument/2006/math" xmlns:wp="http://schemas.openxmlformats.org/drawingml/2006/wordprocessingDrawing" xmlns:wp14="http://schemas.microsoft.com/office/word/2010/wordprocessingDrawing" xmlns:mc="http://schemas.openxmlformats.org/markup-compatibility/2006" xmlns:sl="http://schemas.openxmlformats.org/schemaLibrary/2006/main" xmlns:wne="http://schemas.microsoft.com/office/word/2006/wordml" xmlns:cdr="http://schemas.openxmlformats.org/drawingml/2006/chartDrawing" xmlns:c14="http://schemas.microsoft.com/office/drawing/2007/8/2/chart" xmlns:dgm="http://schemas.openxmlformats.org/drawingml/2006/diagram" xmlns:pic="http://schemas.openxmlformats.org/drawingml/2006/picture" xmlns:xdr="http://schemas.openxmlformats.org/drawingml/2006/spreadsheetDrawing" xmlns:dsp="http://schemas.microsoft.com/office/drawing/2008/diagram" xmlns:xvml="urn:schemas-microsoft-com:office:excel" xmlns:o="urn:schemas-microsoft-com:office:office" xmlns:v="urn:schemas-microsoft-com:vml" xmlns:w10="urn:schemas-microsoft-com:office:word" xmlns:pvml="urn:schemas-microsoft-com:office:powerpoint" xmlns:cppr="http://schemas.microsoft.com/office/2006/coverPageProps" xmlns:odx="http://opendope.org/xpaths" xmlns:odc="http://opendope.org/conditions" xmlns:odq="http://opendope.org/questions" xmlns:oda="http://opendope.org/answers" xmlns:odi="http://opendope.org/components" xmlns:odgm="http://opendope.org/SmartArt/DataHierarchy" xmlns:b="http://schemas.openxmlformats.org/officeDocument/2006/bibliography" xmlns:wps="http://schemas.microsoft.com/office/word/2010/wordprocessingShape" xmlns:w16se="http://schemas.microsoft.com/office/word/2015/wordml/symex" xmlns:w16cid="http://schemas.microsoft.com/office/word/2016/wordml/cid" xmlns:wetp="http://schemas.microsoft.com/office/webextensions/taskpanes/2010/11" xmlns:we="http://schemas.microsoft.com/office/webextensions/webextension/2010/11" xmlns:comp="http://schemas.openxmlformats.org/drawingml/2006/compatibility" xmlns:lc="http://schemas.openxmlformats.org/drawingml/2006/lockedCanvas">
+    <c:showDLblsOverMax val="0"/>
+    <c:extLst xmlns:lc="http://schemas.openxmlformats.org/drawingml/2006/lockedCanvas" xmlns:comp="http://schemas.openxmlformats.org/drawingml/2006/compatibility" xmlns:we="http://schemas.microsoft.com/office/webextensions/webextension/2010/11" xmlns:wetp="http://schemas.microsoft.com/office/webextensions/taskpanes/2010/11" xmlns:w16cid="http://schemas.microsoft.com/office/word/2016/wordml/cid" xmlns:w16se="http://schemas.microsoft.com/office/word/2015/wordml/symex" xmlns:wps="http://schemas.microsoft.com/office/word/2010/wordprocessingShape" xmlns:b="http://schemas.openxmlformats.org/officeDocument/2006/bibliography" xmlns:odgm="http://opendope.org/SmartArt/DataHierarchy" xmlns:odi="http://opendope.org/components" xmlns:oda="http://opendope.org/answers" xmlns:odq="http://opendope.org/questions" xmlns:odc="http://opendope.org/conditions" xmlns:odx="http://opendope.org/xpaths" xmlns:cppr="http://schemas.microsoft.com/office/2006/coverPageProps" xmlns:pvml="urn:schemas-microsoft-com:office:powerpoint" xmlns:w10="urn:schemas-microsoft-com:office:word" xmlns:v="urn:schemas-microsoft-com:vml" xmlns:o="urn:schemas-microsoft-com:office:office" xmlns:xvml="urn:schemas-microsoft-com:office:excel" xmlns:dsp="http://schemas.microsoft.com/office/drawing/2008/diagram" xmlns:xdr="http://schemas.openxmlformats.org/drawingml/2006/spreadsheetDrawing" xmlns:pic="http://schemas.openxmlformats.org/drawingml/2006/picture" xmlns:dgm="http://schemas.openxmlformats.org/drawingml/2006/diagram" xmlns:c14="http://schemas.microsoft.com/office/drawing/2007/8/2/chart" xmlns:cdr="http://schemas.openxmlformats.org/drawingml/2006/chartDrawing" xmlns:wne="http://schemas.microsoft.com/office/word/2006/wordml" xmlns:sl="http://schemas.openxmlformats.org/schemaLibrary/2006/main" xmlns:mc="http://schemas.openxmlformats.org/markup-compatibility/2006" xmlns:wp14="http://schemas.microsoft.com/office/word/2010/wordprocessingDrawing" xmlns:wp="http://schemas.openxmlformats.org/drawingml/2006/wordprocessingDrawing" xmlns:m="http://schemas.openxmlformats.org/officeDocument/2006/math" xmlns:w14="http://schemas.microsoft.com/office/word/2010/wordml" xmlns:w15="http://schemas.microsoft.com/office/word/2012/wordml" xmlns:w="http://schemas.openxmlformats.org/wordprocessingml/2006/main">
       <c:ext xmlns:c16r3="http://schemas.microsoft.com/office/drawing/2017/03/chart" uri="{56B9EC1D-385E-4148-901F-78D8002777C0}">
         <c16r3:dataDisplayOptions16>
           <c16r3:dispNaAsBlank val="1"/>
         </c16r3:dataDisplayOptions16>
       </c:ext>
     </c:extLst>
-    <c:showDLblsOverMax val="0"/>
   </c:chart>
   <c:spPr>
     <a:noFill/>
@@ -10420,7 +10420,7 @@
           <a:p>
             <a:fld id="{C1255C68-584F-174D-BB81-51BF91708794}" type="datetimeFigureOut">
               <a:rPr lang="en-US" smtClean="0"/>
-              <a:t>8/8/25</a:t>
+              <a:t>3/12/26</a:t>
             </a:fld>
             <a:endParaRPr lang="en-US"/>
           </a:p>
@@ -10597,7 +10597,7 @@
           <a:p>
             <a:fld id="{A1EDAAC4-819D-C544-9EA1-C73624CFD70B}" type="datetimeFigureOut">
               <a:rPr lang="en-US" smtClean="0"/>
-              <a:t>8/8/25</a:t>
+              <a:t>3/12/26</a:t>
             </a:fld>
             <a:endParaRPr lang="en-US"/>
           </a:p>
@@ -20558,12 +20558,12 @@
             <p:nvPr userDrawn="1"/>
           </p:nvPicPr>
           <p:blipFill>
-            <a:blip r:embed="rId2">
+            <a:blip>
               <a:lum bright="100000"/>
               <a:alphaModFix amt="80000"/>
               <a:extLst>
                 <a:ext uri="{96DAC541-7B7A-43D3-8B79-37D633B846F1}">
-                  <asvg:svgBlip xmlns:asvg="http://schemas.microsoft.com/office/drawing/2016/SVG/main" r:embed="rId3"/>
+                  <asvg:svgBlip xmlns:asvg="http://schemas.microsoft.com/office/drawing/2016/SVG/main" r:embed="rId2"/>
                 </a:ext>
               </a:extLst>
             </a:blip>
@@ -20675,12 +20675,12 @@
             <p:nvPr userDrawn="1"/>
           </p:nvPicPr>
           <p:blipFill>
-            <a:blip r:embed="rId4">
+            <a:blip>
               <a:lum bright="100000"/>
               <a:alphaModFix amt="80000"/>
               <a:extLst>
                 <a:ext uri="{96DAC541-7B7A-43D3-8B79-37D633B846F1}">
-                  <asvg:svgBlip xmlns:asvg="http://schemas.microsoft.com/office/drawing/2016/SVG/main" r:embed="rId5"/>
+                  <asvg:svgBlip xmlns:asvg="http://schemas.microsoft.com/office/drawing/2016/SVG/main" r:embed="rId3"/>
                 </a:ext>
               </a:extLst>
             </a:blip>
@@ -20792,12 +20792,12 @@
             <p:nvPr userDrawn="1"/>
           </p:nvPicPr>
           <p:blipFill>
-            <a:blip r:embed="rId6">
+            <a:blip>
               <a:lum bright="100000"/>
               <a:alphaModFix amt="80000"/>
               <a:extLst>
                 <a:ext uri="{96DAC541-7B7A-43D3-8B79-37D633B846F1}">
-                  <asvg:svgBlip xmlns:asvg="http://schemas.microsoft.com/office/drawing/2016/SVG/main" r:embed="rId7"/>
+                  <asvg:svgBlip xmlns:asvg="http://schemas.microsoft.com/office/drawing/2016/SVG/main" r:embed="rId4"/>
                 </a:ext>
               </a:extLst>
             </a:blip>
@@ -20898,12 +20898,12 @@
             <p:nvPr userDrawn="1"/>
           </p:nvPicPr>
           <p:blipFill>
-            <a:blip r:embed="rId8">
+            <a:blip>
               <a:lum bright="100000"/>
               <a:alphaModFix amt="80000"/>
               <a:extLst>
                 <a:ext uri="{96DAC541-7B7A-43D3-8B79-37D633B846F1}">
-                  <asvg:svgBlip xmlns:asvg="http://schemas.microsoft.com/office/drawing/2016/SVG/main" r:embed="rId9"/>
+                  <asvg:svgBlip xmlns:asvg="http://schemas.microsoft.com/office/drawing/2016/SVG/main" r:embed="rId5"/>
                 </a:ext>
               </a:extLst>
             </a:blip>
@@ -21026,12 +21026,12 @@
             <p:nvPr userDrawn="1"/>
           </p:nvPicPr>
           <p:blipFill>
-            <a:blip r:embed="rId10">
+            <a:blip>
               <a:lum bright="100000"/>
               <a:alphaModFix amt="80000"/>
               <a:extLst>
                 <a:ext uri="{96DAC541-7B7A-43D3-8B79-37D633B846F1}">
-                  <asvg:svgBlip xmlns:asvg="http://schemas.microsoft.com/office/drawing/2016/SVG/main" r:embed="rId11"/>
+                  <asvg:svgBlip xmlns:asvg="http://schemas.microsoft.com/office/drawing/2016/SVG/main" r:embed="rId6"/>
                 </a:ext>
               </a:extLst>
             </a:blip>
@@ -21132,12 +21132,12 @@
             <p:nvPr userDrawn="1"/>
           </p:nvPicPr>
           <p:blipFill>
-            <a:blip r:embed="rId12">
+            <a:blip>
               <a:lum bright="100000"/>
               <a:alphaModFix amt="80000"/>
               <a:extLst>
                 <a:ext uri="{96DAC541-7B7A-43D3-8B79-37D633B846F1}">
-                  <asvg:svgBlip xmlns:asvg="http://schemas.microsoft.com/office/drawing/2016/SVG/main" r:embed="rId13"/>
+                  <asvg:svgBlip xmlns:asvg="http://schemas.microsoft.com/office/drawing/2016/SVG/main" r:embed="rId7"/>
                 </a:ext>
               </a:extLst>
             </a:blip>
@@ -32057,7 +32057,7 @@
       </p:sp>
       <p:graphicFrame>
         <p:nvGraphicFramePr>
-          <p:cNvPr id="6" name="Chart 5">
+          <p:cNvPr id="6" name="OBJECTIVES_ARCHITECTURE_CHART">
             <a:extLst>
               <a:ext uri="{FF2B5EF4-FFF2-40B4-BE49-F238E27FC236}">
                 <a16:creationId xmlns:a16="http://schemas.microsoft.com/office/drawing/2014/main" id="{FBB521E4-96ED-814A-B322-AFBA0633E84C}"/>
@@ -32065,7 +32065,13 @@
             </a:extLst>
           </p:cNvPr>
           <p:cNvGraphicFramePr/>
-          <p:nvPr/>
+          <p:nvPr>
+            <p:extLst>
+              <p:ext uri="{D42A27DB-BD31-4B8C-83A1-F6EECF244321}">
+                <p14:modId xmlns:p14="http://schemas.microsoft.com/office/powerpoint/2010/main" val="687656309"/>
+              </p:ext>
+            </p:extLst>
+          </p:nvPr>
         </p:nvGraphicFramePr>
         <p:xfrm>
           <a:off x="478224" y="1606666"/>
@@ -32077,42 +32083,6 @@
           </a:graphicData>
         </a:graphic>
       </p:graphicFrame>
-      <p:sp>
-        <p:nvSpPr>
-          <p:cNvPr id="7" name="TextBox 6">
-            <a:extLst>
-              <a:ext uri="{FF2B5EF4-FFF2-40B4-BE49-F238E27FC236}">
-                <a16:creationId xmlns:a16="http://schemas.microsoft.com/office/drawing/2014/main" id="{41183F90-63B2-0646-9068-7E4E2BCF14D9}"/>
-              </a:ext>
-            </a:extLst>
-          </p:cNvPr>
-          <p:cNvSpPr txBox="1"/>
-          <p:nvPr/>
-        </p:nvSpPr>
-        <p:spPr>
-          <a:xfrm>
-            <a:off x="8958648" y="-525758"/>
-            <a:ext cx="3635054" cy="369332"/>
-          </a:xfrm>
-          <a:prstGeom prst="rect">
-            <a:avLst/>
-          </a:prstGeom>
-          <a:noFill/>
-        </p:spPr>
-        <p:txBody>
-          <a:bodyPr wrap="none" lIns="90000" rtlCol="0" anchor="t">
-            <a:spAutoFit/>
-          </a:bodyPr>
-          <a:lstStyle/>
-          <a:p>
-            <a:r>
-              <a:rPr lang="en-US" b="1"/>
-              <a:t>OBJECTIVES_ARCHITECTURE_CHART</a:t>
-            </a:r>
-            <a:endParaRPr lang="en-US"/>
-          </a:p>
-        </p:txBody>
-      </p:sp>
       <p:sp>
         <p:nvSpPr>
           <p:cNvPr id="8" name="TextBox 7">
@@ -32426,7 +32396,7 @@
       </p:sp>
       <p:graphicFrame>
         <p:nvGraphicFramePr>
-          <p:cNvPr id="6" name="Chart 5">
+          <p:cNvPr id="6" name="OBJECTIVES_STATUS_CHART">
             <a:extLst>
               <a:ext uri="{FF2B5EF4-FFF2-40B4-BE49-F238E27FC236}">
                 <a16:creationId xmlns:a16="http://schemas.microsoft.com/office/drawing/2014/main" id="{9A17AFA3-FC96-B65B-0A6A-D4A1754157FE}"/>
@@ -32437,7 +32407,7 @@
           <p:nvPr>
             <p:extLst>
               <p:ext uri="{D42A27DB-BD31-4B8C-83A1-F6EECF244321}">
-                <p14:modId xmlns:p14="http://schemas.microsoft.com/office/powerpoint/2010/main" val="469187844"/>
+                <p14:modId xmlns:p14="http://schemas.microsoft.com/office/powerpoint/2010/main" val="1764705810"/>
               </p:ext>
             </p:extLst>
           </p:nvPr>
@@ -32452,42 +32422,6 @@
           </a:graphicData>
         </a:graphic>
       </p:graphicFrame>
-      <p:sp>
-        <p:nvSpPr>
-          <p:cNvPr id="7" name="TextBox 6">
-            <a:extLst>
-              <a:ext uri="{FF2B5EF4-FFF2-40B4-BE49-F238E27FC236}">
-                <a16:creationId xmlns:a16="http://schemas.microsoft.com/office/drawing/2014/main" id="{1352F2E2-69B9-D866-7D75-24F10BB85A60}"/>
-              </a:ext>
-            </a:extLst>
-          </p:cNvPr>
-          <p:cNvSpPr txBox="1"/>
-          <p:nvPr/>
-        </p:nvSpPr>
-        <p:spPr>
-          <a:xfrm>
-            <a:off x="8958648" y="-525758"/>
-            <a:ext cx="2884016" cy="369332"/>
-          </a:xfrm>
-          <a:prstGeom prst="rect">
-            <a:avLst/>
-          </a:prstGeom>
-          <a:noFill/>
-        </p:spPr>
-        <p:txBody>
-          <a:bodyPr wrap="none" lIns="90000" rtlCol="0" anchor="t">
-            <a:spAutoFit/>
-          </a:bodyPr>
-          <a:lstStyle/>
-          <a:p>
-            <a:r>
-              <a:rPr lang="en-US" b="1"/>
-              <a:t>OBJECTIVES_STATUS_CHART</a:t>
-            </a:r>
-            <a:endParaRPr lang="en-US"/>
-          </a:p>
-        </p:txBody>
-      </p:sp>
       <p:sp>
         <p:nvSpPr>
           <p:cNvPr id="8" name="TextBox 7">
@@ -32764,20 +32698,15 @@
           <a:lstStyle/>
           <a:p>
             <a:r>
-              <a:rPr lang="en-US"/>
-              <a:t>Progress towards objectives per team between </a:t>
+              <a:rPr lang="en-US" dirty="0"/>
+              <a:t>Progress towards objectives per team between OBJECTIVES_PERIOD_START and OBJECTIVES_PERIOD_END</a:t>
             </a:r>
-            <a:r>
-              <a:rPr lang="en-US" dirty="0"/>
-              <a:t>OBJECTIVES_PERIOD_START and OBJECTIVES_PERIOD_END</a:t>
-            </a:r>
-            <a:endParaRPr lang="en-US"/>
           </a:p>
         </p:txBody>
       </p:sp>
       <p:graphicFrame>
         <p:nvGraphicFramePr>
-          <p:cNvPr id="6" name="Chart 5">
+          <p:cNvPr id="6" name="OBJECTIVES_TEAM_CHART">
             <a:extLst>
               <a:ext uri="{FF2B5EF4-FFF2-40B4-BE49-F238E27FC236}">
                 <a16:creationId xmlns:a16="http://schemas.microsoft.com/office/drawing/2014/main" id="{C8EC5A35-9538-D995-065E-528B18F85DED}"/>
@@ -32803,42 +32732,6 @@
           </a:graphicData>
         </a:graphic>
       </p:graphicFrame>
-      <p:sp>
-        <p:nvSpPr>
-          <p:cNvPr id="7" name="TextBox 6">
-            <a:extLst>
-              <a:ext uri="{FF2B5EF4-FFF2-40B4-BE49-F238E27FC236}">
-                <a16:creationId xmlns:a16="http://schemas.microsoft.com/office/drawing/2014/main" id="{680F10C8-8291-84BB-615B-4FE46E9122C0}"/>
-              </a:ext>
-            </a:extLst>
-          </p:cNvPr>
-          <p:cNvSpPr txBox="1"/>
-          <p:nvPr/>
-        </p:nvSpPr>
-        <p:spPr>
-          <a:xfrm>
-            <a:off x="8958648" y="-525758"/>
-            <a:ext cx="2751287" cy="369332"/>
-          </a:xfrm>
-          <a:prstGeom prst="rect">
-            <a:avLst/>
-          </a:prstGeom>
-          <a:noFill/>
-        </p:spPr>
-        <p:txBody>
-          <a:bodyPr wrap="none" lIns="90000" rtlCol="0" anchor="t">
-            <a:spAutoFit/>
-          </a:bodyPr>
-          <a:lstStyle/>
-          <a:p>
-            <a:r>
-              <a:rPr lang="en-US" b="1"/>
-              <a:t>OBJECTIVES_TEAM_CHART</a:t>
-            </a:r>
-            <a:endParaRPr lang="en-US"/>
-          </a:p>
-        </p:txBody>
-      </p:sp>
       <p:sp>
         <p:nvSpPr>
           <p:cNvPr id="8" name="TextBox 7">
@@ -33128,7 +33021,7 @@
       </p:sp>
       <p:graphicFrame>
         <p:nvGraphicFramePr>
-          <p:cNvPr id="6" name="Chart 5">
+          <p:cNvPr id="6" name="OBJECTIVES_CAPABILITY_CHART">
             <a:extLst>
               <a:ext uri="{FF2B5EF4-FFF2-40B4-BE49-F238E27FC236}">
                 <a16:creationId xmlns:a16="http://schemas.microsoft.com/office/drawing/2014/main" id="{2774041C-71AE-0495-78BB-3253007E9E90}"/>
@@ -33154,42 +33047,6 @@
           </a:graphicData>
         </a:graphic>
       </p:graphicFrame>
-      <p:sp>
-        <p:nvSpPr>
-          <p:cNvPr id="7" name="TextBox 6">
-            <a:extLst>
-              <a:ext uri="{FF2B5EF4-FFF2-40B4-BE49-F238E27FC236}">
-                <a16:creationId xmlns:a16="http://schemas.microsoft.com/office/drawing/2014/main" id="{E75AA9D8-EEB6-8709-C209-D32FF5C291E0}"/>
-              </a:ext>
-            </a:extLst>
-          </p:cNvPr>
-          <p:cNvSpPr txBox="1"/>
-          <p:nvPr/>
-        </p:nvSpPr>
-        <p:spPr>
-          <a:xfrm>
-            <a:off x="8958648" y="-525758"/>
-            <a:ext cx="3278675" cy="369332"/>
-          </a:xfrm>
-          <a:prstGeom prst="rect">
-            <a:avLst/>
-          </a:prstGeom>
-          <a:noFill/>
-        </p:spPr>
-        <p:txBody>
-          <a:bodyPr wrap="none" lIns="90000" rtlCol="0" anchor="t">
-            <a:spAutoFit/>
-          </a:bodyPr>
-          <a:lstStyle/>
-          <a:p>
-            <a:r>
-              <a:rPr lang="en-US" b="1"/>
-              <a:t>OBJECTIVES_CAPABILITY_CHART</a:t>
-            </a:r>
-            <a:endParaRPr lang="en-US"/>
-          </a:p>
-        </p:txBody>
-      </p:sp>
       <p:sp>
         <p:nvSpPr>
           <p:cNvPr id="8" name="TextBox 7">
@@ -33474,7 +33331,7 @@
       </p:sp>
       <p:graphicFrame>
         <p:nvGraphicFramePr>
-          <p:cNvPr id="6" name="Chart 5">
+          <p:cNvPr id="6" name="OBJECTIVES_OVERALL_CHART">
             <a:extLst>
               <a:ext uri="{FF2B5EF4-FFF2-40B4-BE49-F238E27FC236}">
                 <a16:creationId xmlns:a16="http://schemas.microsoft.com/office/drawing/2014/main" id="{CED42228-B917-5A3E-BB6B-9871F4C489AA}"/>
@@ -33494,42 +33351,6 @@
           </a:graphicData>
         </a:graphic>
       </p:graphicFrame>
-      <p:sp>
-        <p:nvSpPr>
-          <p:cNvPr id="7" name="TextBox 6">
-            <a:extLst>
-              <a:ext uri="{FF2B5EF4-FFF2-40B4-BE49-F238E27FC236}">
-                <a16:creationId xmlns:a16="http://schemas.microsoft.com/office/drawing/2014/main" id="{025FA84B-5F3F-E103-125D-195720E3F1F8}"/>
-              </a:ext>
-            </a:extLst>
-          </p:cNvPr>
-          <p:cNvSpPr txBox="1"/>
-          <p:nvPr/>
-        </p:nvSpPr>
-        <p:spPr>
-          <a:xfrm>
-            <a:off x="8958648" y="-525758"/>
-            <a:ext cx="3051498" cy="369332"/>
-          </a:xfrm>
-          <a:prstGeom prst="rect">
-            <a:avLst/>
-          </a:prstGeom>
-          <a:noFill/>
-        </p:spPr>
-        <p:txBody>
-          <a:bodyPr wrap="none" lIns="90000" rtlCol="0" anchor="t">
-            <a:spAutoFit/>
-          </a:bodyPr>
-          <a:lstStyle/>
-          <a:p>
-            <a:r>
-              <a:rPr lang="en-US" b="1"/>
-              <a:t>OBJECTIVES_OVERALL_CHART</a:t>
-            </a:r>
-            <a:endParaRPr lang="en-US"/>
-          </a:p>
-        </p:txBody>
-      </p:sp>
       <p:sp>
         <p:nvSpPr>
           <p:cNvPr id="8" name="TextBox 7">
@@ -34029,7 +33850,7 @@
       </p:sp>
       <p:graphicFrame>
         <p:nvGraphicFramePr>
-          <p:cNvPr id="6" name="Chart 5">
+          <p:cNvPr id="6" name="OBJECTIVES_SECURITY_CHART">
             <a:extLst>
               <a:ext uri="{FF2B5EF4-FFF2-40B4-BE49-F238E27FC236}">
                 <a16:creationId xmlns:a16="http://schemas.microsoft.com/office/drawing/2014/main" id="{EA804B61-8F8C-C6D5-94BB-B5CA583E7BE3}"/>
@@ -34037,7 +33858,13 @@
             </a:extLst>
           </p:cNvPr>
           <p:cNvGraphicFramePr/>
-          <p:nvPr/>
+          <p:nvPr>
+            <p:extLst>
+              <p:ext uri="{D42A27DB-BD31-4B8C-83A1-F6EECF244321}">
+                <p14:modId xmlns:p14="http://schemas.microsoft.com/office/powerpoint/2010/main" val="3697432841"/>
+              </p:ext>
+            </p:extLst>
+          </p:nvPr>
         </p:nvGraphicFramePr>
         <p:xfrm>
           <a:off x="478224" y="1606666"/>
@@ -34049,42 +33876,6 @@
           </a:graphicData>
         </a:graphic>
       </p:graphicFrame>
-      <p:sp>
-        <p:nvSpPr>
-          <p:cNvPr id="7" name="TextBox 6">
-            <a:extLst>
-              <a:ext uri="{FF2B5EF4-FFF2-40B4-BE49-F238E27FC236}">
-                <a16:creationId xmlns:a16="http://schemas.microsoft.com/office/drawing/2014/main" id="{659FCAA8-D0E0-3539-B820-DF6D6318129E}"/>
-              </a:ext>
-            </a:extLst>
-          </p:cNvPr>
-          <p:cNvSpPr txBox="1"/>
-          <p:nvPr/>
-        </p:nvSpPr>
-        <p:spPr>
-          <a:xfrm>
-            <a:off x="8958648" y="-525758"/>
-            <a:ext cx="3101768" cy="369332"/>
-          </a:xfrm>
-          <a:prstGeom prst="rect">
-            <a:avLst/>
-          </a:prstGeom>
-          <a:noFill/>
-        </p:spPr>
-        <p:txBody>
-          <a:bodyPr wrap="none" lIns="90000" rtlCol="0" anchor="t">
-            <a:spAutoFit/>
-          </a:bodyPr>
-          <a:lstStyle/>
-          <a:p>
-            <a:r>
-              <a:rPr lang="en-US" b="1"/>
-              <a:t>OBJECTIVES_SECURITY_CHART</a:t>
-            </a:r>
-            <a:endParaRPr lang="en-US"/>
-          </a:p>
-        </p:txBody>
-      </p:sp>
       <p:sp>
         <p:nvSpPr>
           <p:cNvPr id="8" name="TextBox 7">
@@ -34369,7 +34160,7 @@
       </p:sp>
       <p:graphicFrame>
         <p:nvGraphicFramePr>
-          <p:cNvPr id="6" name="Chart 5">
+          <p:cNvPr id="6" name="OBJECTIVES_OSH_CHART">
             <a:extLst>
               <a:ext uri="{FF2B5EF4-FFF2-40B4-BE49-F238E27FC236}">
                 <a16:creationId xmlns:a16="http://schemas.microsoft.com/office/drawing/2014/main" id="{1551057A-38E3-B1CD-A98D-FA6566BDC6A6}"/>
@@ -34377,7 +34168,13 @@
             </a:extLst>
           </p:cNvPr>
           <p:cNvGraphicFramePr/>
-          <p:nvPr/>
+          <p:nvPr>
+            <p:extLst>
+              <p:ext uri="{D42A27DB-BD31-4B8C-83A1-F6EECF244321}">
+                <p14:modId xmlns:p14="http://schemas.microsoft.com/office/powerpoint/2010/main" val="4148586428"/>
+              </p:ext>
+            </p:extLst>
+          </p:nvPr>
         </p:nvGraphicFramePr>
         <p:xfrm>
           <a:off x="478224" y="1606666"/>
@@ -34389,42 +34186,6 @@
           </a:graphicData>
         </a:graphic>
       </p:graphicFrame>
-      <p:sp>
-        <p:nvSpPr>
-          <p:cNvPr id="7" name="TextBox 6">
-            <a:extLst>
-              <a:ext uri="{FF2B5EF4-FFF2-40B4-BE49-F238E27FC236}">
-                <a16:creationId xmlns:a16="http://schemas.microsoft.com/office/drawing/2014/main" id="{AAE381E8-8BDC-C11E-0B4E-573D2927E3C8}"/>
-              </a:ext>
-            </a:extLst>
-          </p:cNvPr>
-          <p:cNvSpPr txBox="1"/>
-          <p:nvPr/>
-        </p:nvSpPr>
-        <p:spPr>
-          <a:xfrm>
-            <a:off x="8958648" y="-525758"/>
-            <a:ext cx="2597014" cy="369332"/>
-          </a:xfrm>
-          <a:prstGeom prst="rect">
-            <a:avLst/>
-          </a:prstGeom>
-          <a:noFill/>
-        </p:spPr>
-        <p:txBody>
-          <a:bodyPr wrap="none" lIns="90000" rtlCol="0" anchor="t">
-            <a:spAutoFit/>
-          </a:bodyPr>
-          <a:lstStyle/>
-          <a:p>
-            <a:r>
-              <a:rPr lang="en-US" b="1"/>
-              <a:t>OBJECTIVES_OSH_CHART</a:t>
-            </a:r>
-            <a:endParaRPr lang="en-US"/>
-          </a:p>
-        </p:txBody>
-      </p:sp>
       <p:sp>
         <p:nvSpPr>
           <p:cNvPr id="8" name="TextBox 7">
@@ -34709,7 +34470,7 @@
       </p:sp>
       <p:graphicFrame>
         <p:nvGraphicFramePr>
-          <p:cNvPr id="6" name="Chart 5">
+          <p:cNvPr id="6" name="OBJECTIVES_MAINTAINABILITY_CHART">
             <a:extLst>
               <a:ext uri="{FF2B5EF4-FFF2-40B4-BE49-F238E27FC236}">
                 <a16:creationId xmlns:a16="http://schemas.microsoft.com/office/drawing/2014/main" id="{D309D7A3-6D2B-5238-FDCA-89277EA3E24A}"/>
@@ -34717,7 +34478,13 @@
             </a:extLst>
           </p:cNvPr>
           <p:cNvGraphicFramePr/>
-          <p:nvPr/>
+          <p:nvPr>
+            <p:extLst>
+              <p:ext uri="{D42A27DB-BD31-4B8C-83A1-F6EECF244321}">
+                <p14:modId xmlns:p14="http://schemas.microsoft.com/office/powerpoint/2010/main" val="3629184054"/>
+              </p:ext>
+            </p:extLst>
+          </p:nvPr>
         </p:nvGraphicFramePr>
         <p:xfrm>
           <a:off x="478224" y="1606666"/>
@@ -34729,42 +34496,6 @@
           </a:graphicData>
         </a:graphic>
       </p:graphicFrame>
-      <p:sp>
-        <p:nvSpPr>
-          <p:cNvPr id="7" name="TextBox 6">
-            <a:extLst>
-              <a:ext uri="{FF2B5EF4-FFF2-40B4-BE49-F238E27FC236}">
-                <a16:creationId xmlns:a16="http://schemas.microsoft.com/office/drawing/2014/main" id="{FBB95D9E-971C-257B-3338-71CD7C91C015}"/>
-              </a:ext>
-            </a:extLst>
-          </p:cNvPr>
-          <p:cNvSpPr txBox="1"/>
-          <p:nvPr/>
-        </p:nvSpPr>
-        <p:spPr>
-          <a:xfrm>
-            <a:off x="8958648" y="-525758"/>
-            <a:ext cx="3912566" cy="369332"/>
-          </a:xfrm>
-          <a:prstGeom prst="rect">
-            <a:avLst/>
-          </a:prstGeom>
-          <a:noFill/>
-        </p:spPr>
-        <p:txBody>
-          <a:bodyPr wrap="none" lIns="90000" rtlCol="0" anchor="t">
-            <a:spAutoFit/>
-          </a:bodyPr>
-          <a:lstStyle/>
-          <a:p>
-            <a:r>
-              <a:rPr lang="en-US" b="1"/>
-              <a:t>OBJECTIVES_MAINTAINABILITY_CHART</a:t>
-            </a:r>
-            <a:endParaRPr lang="en-US"/>
-          </a:p>
-        </p:txBody>
-      </p:sp>
       <p:sp>
         <p:nvSpPr>
           <p:cNvPr id="8" name="TextBox 7">
@@ -35839,12 +35570,14 @@
 </file>
 
 <file path=customXml/item1.xml><?xml version="1.0" encoding="utf-8"?>
-<?mso-contentType ?>
-<FormTemplates xmlns="http://schemas.microsoft.com/sharepoint/v3/contenttype/forms">
-  <Display>DocumentLibraryForm</Display>
-  <Edit>DocumentLibraryForm</Edit>
-  <New>DocumentLibraryForm</New>
-</FormTemplates>
+<p:properties xmlns:p="http://schemas.microsoft.com/office/2006/metadata/properties" xmlns:xsi="http://www.w3.org/2001/XMLSchema-instance" xmlns:pc="http://schemas.microsoft.com/office/infopath/2007/PartnerControls">
+  <documentManagement>
+    <lcf76f155ced4ddcb4097134ff3c332f xmlns="fa937df2-abe2-4d38-b5f4-c228acba3827">
+      <Terms xmlns="http://schemas.microsoft.com/office/infopath/2007/PartnerControls"/>
+    </lcf76f155ced4ddcb4097134ff3c332f>
+    <TaxCatchAll xmlns="bc8ba18a-4a58-4ad2-bfc0-6516af8e7dc2" xsi:nil="true"/>
+  </documentManagement>
+</p:properties>
 </file>
 
 <file path=customXml/item2.xml><?xml version="1.0" encoding="utf-8"?>
@@ -36071,20 +35804,27 @@
 </file>
 
 <file path=customXml/item3.xml><?xml version="1.0" encoding="utf-8"?>
-<p:properties xmlns:p="http://schemas.microsoft.com/office/2006/metadata/properties" xmlns:xsi="http://www.w3.org/2001/XMLSchema-instance" xmlns:pc="http://schemas.microsoft.com/office/infopath/2007/PartnerControls">
-  <documentManagement>
-    <lcf76f155ced4ddcb4097134ff3c332f xmlns="fa937df2-abe2-4d38-b5f4-c228acba3827">
-      <Terms xmlns="http://schemas.microsoft.com/office/infopath/2007/PartnerControls"/>
-    </lcf76f155ced4ddcb4097134ff3c332f>
-    <TaxCatchAll xmlns="bc8ba18a-4a58-4ad2-bfc0-6516af8e7dc2" xsi:nil="true"/>
-  </documentManagement>
-</p:properties>
+<?mso-contentType ?>
+<FormTemplates xmlns="http://schemas.microsoft.com/sharepoint/v3/contenttype/forms">
+  <Display>DocumentLibraryForm</Display>
+  <Edit>DocumentLibraryForm</Edit>
+  <New>DocumentLibraryForm</New>
+</FormTemplates>
 </file>
 
 <file path=customXml/itemProps1.xml><?xml version="1.0" encoding="utf-8"?>
-<ds:datastoreItem xmlns:ds="http://schemas.openxmlformats.org/officeDocument/2006/customXml" ds:itemID="{570928F0-D7CA-4732-B7F3-1F945720D0AA}">
+<ds:datastoreItem xmlns:ds="http://schemas.openxmlformats.org/officeDocument/2006/customXml" ds:itemID="{4B629362-CF15-4610-8FAC-A8E699942233}">
   <ds:schemaRefs>
-    <ds:schemaRef ds:uri="http://schemas.microsoft.com/sharepoint/v3/contenttype/forms"/>
+    <ds:schemaRef ds:uri="http://schemas.microsoft.com/office/2006/documentManagement/types"/>
+    <ds:schemaRef ds:uri="http://purl.org/dc/elements/1.1/"/>
+    <ds:schemaRef ds:uri="bc8ba18a-4a58-4ad2-bfc0-6516af8e7dc2"/>
+    <ds:schemaRef ds:uri="http://purl.org/dc/terms/"/>
+    <ds:schemaRef ds:uri="http://www.w3.org/XML/1998/namespace"/>
+    <ds:schemaRef ds:uri="http://schemas.microsoft.com/office/2006/metadata/properties"/>
+    <ds:schemaRef ds:uri="http://schemas.microsoft.com/office/infopath/2007/PartnerControls"/>
+    <ds:schemaRef ds:uri="http://schemas.openxmlformats.org/package/2006/metadata/core-properties"/>
+    <ds:schemaRef ds:uri="fa937df2-abe2-4d38-b5f4-c228acba3827"/>
+    <ds:schemaRef ds:uri="http://purl.org/dc/dcmitype/"/>
   </ds:schemaRefs>
 </ds:datastoreItem>
 </file>
@@ -36109,18 +35849,9 @@
 </file>
 
 <file path=customXml/itemProps3.xml><?xml version="1.0" encoding="utf-8"?>
-<ds:datastoreItem xmlns:ds="http://schemas.openxmlformats.org/officeDocument/2006/customXml" ds:itemID="{4B629362-CF15-4610-8FAC-A8E699942233}">
+<ds:datastoreItem xmlns:ds="http://schemas.openxmlformats.org/officeDocument/2006/customXml" ds:itemID="{570928F0-D7CA-4732-B7F3-1F945720D0AA}">
   <ds:schemaRefs>
-    <ds:schemaRef ds:uri="http://schemas.microsoft.com/office/2006/documentManagement/types"/>
-    <ds:schemaRef ds:uri="http://purl.org/dc/elements/1.1/"/>
-    <ds:schemaRef ds:uri="bc8ba18a-4a58-4ad2-bfc0-6516af8e7dc2"/>
-    <ds:schemaRef ds:uri="http://purl.org/dc/terms/"/>
-    <ds:schemaRef ds:uri="http://www.w3.org/XML/1998/namespace"/>
-    <ds:schemaRef ds:uri="http://schemas.microsoft.com/office/2006/metadata/properties"/>
-    <ds:schemaRef ds:uri="http://schemas.microsoft.com/office/infopath/2007/PartnerControls"/>
-    <ds:schemaRef ds:uri="http://schemas.openxmlformats.org/package/2006/metadata/core-properties"/>
-    <ds:schemaRef ds:uri="fa937df2-abe2-4d38-b5f4-c228acba3827"/>
-    <ds:schemaRef ds:uri="http://purl.org/dc/dcmitype/"/>
+    <ds:schemaRef ds:uri="http://schemas.microsoft.com/sharepoint/v3/contenttype/forms"/>
   </ds:schemaRefs>
 </ds:datastoreItem>
 </file>